--- a/reports/ssg-delivery-report.pptx
+++ b/reports/ssg-delivery-report.pptx
@@ -3561,6 +3561,43 @@
         </p:nvSpPr>
         <p:spPr>
           <a:xfrm>
+            <a:off x="417600" y="1044000"/>
+            <a:ext cx="7848000" cy="234000"/>
+          </a:xfrm>
+          <a:prstGeom prst="rect">
+            <a:avLst/>
+          </a:prstGeom>
+          <a:noFill/>
+        </p:spPr>
+        <p:txBody>
+          <a:bodyPr wrap="square" anchor="t" lIns="0" rIns="0" tIns="0" bIns="0">
+            <a:spAutoFit/>
+          </a:bodyPr>
+          <a:lstStyle/>
+          <a:p>
+            <a:pPr algn="l"/>
+            <a:r>
+              <a:rPr sz="1400" b="1">
+                <a:solidFill>
+                  <a:srgbClr val="000000"/>
+                </a:solidFill>
+                <a:latin typeface="맑은 고딕"/>
+                <a:ea typeface="맑은 고딕"/>
+                <a:cs typeface="맑은 고딕"/>
+              </a:rPr>
+              <a:t>■ 양재·하남점 '2시간 내 배송' 시범 도입 — 대용량 장보기 공략, PP센터 가동률 제고</a:t>
+            </a:r>
+          </a:p>
+        </p:txBody>
+      </p:sp>
+      <p:sp>
+        <p:nvSpPr>
+          <p:cNvPr id="4" name="TextBox 3"/>
+          <p:cNvSpPr txBox="1"/>
+          <p:nvPr/>
+        </p:nvSpPr>
+        <p:spPr>
+          <a:xfrm>
             <a:off x="374400" y="6443999"/>
             <a:ext cx="6480000" cy="198000"/>
           </a:xfrm>
@@ -3592,7 +3629,7 @@
       </p:sp>
       <p:sp>
         <p:nvSpPr>
-          <p:cNvPr id="4" name="TextBox 3"/>
+          <p:cNvPr id="5" name="TextBox 4"/>
           <p:cNvSpPr txBox="1"/>
           <p:nvPr/>
         </p:nvSpPr>
@@ -3629,14 +3666,14 @@
       </p:sp>
       <p:sp>
         <p:nvSpPr>
-          <p:cNvPr id="5" name="TextBox 4"/>
+          <p:cNvPr id="6" name="TextBox 5"/>
           <p:cNvSpPr txBox="1"/>
           <p:nvPr/>
         </p:nvSpPr>
         <p:spPr>
           <a:xfrm>
-            <a:off x="406799" y="1080000"/>
-            <a:ext cx="9093600" cy="342000"/>
+            <a:off x="406799" y="1475999"/>
+            <a:ext cx="9093600" cy="345600"/>
           </a:xfrm>
           <a:prstGeom prst="rect">
             <a:avLst/>
@@ -3666,14 +3703,14 @@
       </p:sp>
       <p:sp>
         <p:nvSpPr>
-          <p:cNvPr id="6" name="TextBox 5"/>
+          <p:cNvPr id="7" name="TextBox 6"/>
           <p:cNvSpPr txBox="1"/>
           <p:nvPr/>
         </p:nvSpPr>
         <p:spPr>
           <a:xfrm>
-            <a:off x="658800" y="1422000"/>
-            <a:ext cx="8841600" cy="342000"/>
+            <a:off x="658800" y="1821599"/>
+            <a:ext cx="8841600" cy="345600"/>
           </a:xfrm>
           <a:prstGeom prst="rect">
             <a:avLst/>
@@ -3703,14 +3740,14 @@
       </p:sp>
       <p:sp>
         <p:nvSpPr>
-          <p:cNvPr id="7" name="TextBox 6"/>
+          <p:cNvPr id="8" name="TextBox 7"/>
           <p:cNvSpPr txBox="1"/>
           <p:nvPr/>
         </p:nvSpPr>
         <p:spPr>
           <a:xfrm>
-            <a:off x="406799" y="1764000"/>
-            <a:ext cx="9093600" cy="342000"/>
+            <a:off x="406799" y="2167200"/>
+            <a:ext cx="9093600" cy="345600"/>
           </a:xfrm>
           <a:prstGeom prst="rect">
             <a:avLst/>
@@ -3740,14 +3777,14 @@
       </p:sp>
       <p:sp>
         <p:nvSpPr>
-          <p:cNvPr id="8" name="TextBox 7"/>
+          <p:cNvPr id="9" name="TextBox 8"/>
           <p:cNvSpPr txBox="1"/>
           <p:nvPr/>
         </p:nvSpPr>
         <p:spPr>
           <a:xfrm>
-            <a:off x="406799" y="2106000"/>
-            <a:ext cx="9093600" cy="342000"/>
+            <a:off x="406799" y="2512800"/>
+            <a:ext cx="9093600" cy="345600"/>
           </a:xfrm>
           <a:prstGeom prst="rect">
             <a:avLst/>
@@ -3777,15 +3814,15 @@
       </p:sp>
       <p:graphicFrame>
         <p:nvGraphicFramePr>
-          <p:cNvPr id="9" name="Table 8"/>
+          <p:cNvPr id="10" name="Table 9"/>
           <p:cNvGraphicFramePr>
             <a:graphicFrameLocks noGrp="1"/>
           </p:cNvGraphicFramePr>
           <p:nvPr/>
         </p:nvGraphicFramePr>
         <p:xfrm>
-          <a:off x="406799" y="2951999"/>
-          <a:ext cx="9093600" cy="1655999"/>
+          <a:off x="406799" y="3038400"/>
+          <a:ext cx="9093600" cy="1584000"/>
         </p:xfrm>
         <a:graphic>
           <a:graphicData uri="http://schemas.openxmlformats.org/drawingml/2006/table">
@@ -3797,7 +3834,7 @@
                 <a:gridCol w="2160000"/>
                 <a:gridCol w="6933600"/>
               </a:tblGrid>
-              <a:tr h="331199">
+              <a:tr h="316800">
                 <a:tc>
                   <a:txBody>
                     <a:bodyPr wrap="square"/>
@@ -3849,7 +3886,7 @@
                   </a:tcPr>
                 </a:tc>
               </a:tr>
-              <a:tr h="331199">
+              <a:tr h="316800">
                 <a:tc>
                   <a:txBody>
                     <a:bodyPr wrap="square"/>
@@ -3901,7 +3938,7 @@
                   </a:tcPr>
                 </a:tc>
               </a:tr>
-              <a:tr h="331199">
+              <a:tr h="316800">
                 <a:tc>
                   <a:txBody>
                     <a:bodyPr wrap="square"/>
@@ -3953,7 +3990,7 @@
                   </a:tcPr>
                 </a:tc>
               </a:tr>
-              <a:tr h="331199">
+              <a:tr h="316800">
                 <a:tc>
                   <a:txBody>
                     <a:bodyPr wrap="square"/>
@@ -4005,7 +4042,7 @@
                   </a:tcPr>
                 </a:tc>
               </a:tr>
-              <a:tr h="331203">
+              <a:tr h="316800">
                 <a:tc>
                   <a:txBody>
                     <a:bodyPr wrap="square"/>
@@ -4135,6 +4172,43 @@
         </p:nvSpPr>
         <p:spPr>
           <a:xfrm>
+            <a:off x="417600" y="1044000"/>
+            <a:ext cx="7848000" cy="234000"/>
+          </a:xfrm>
+          <a:prstGeom prst="rect">
+            <a:avLst/>
+          </a:prstGeom>
+          <a:noFill/>
+        </p:spPr>
+        <p:txBody>
+          <a:bodyPr wrap="square" anchor="t" lIns="0" rIns="0" tIns="0" bIns="0">
+            <a:spAutoFit/>
+          </a:bodyPr>
+          <a:lstStyle/>
+          <a:p>
+            <a:pPr algn="l"/>
+            <a:r>
+              <a:rPr sz="1400" b="1">
+                <a:solidFill>
+                  <a:srgbClr val="000000"/>
+                </a:solidFill>
+                <a:latin typeface="맑은 고딕"/>
+                <a:ea typeface="맑은 고딕"/>
+                <a:cs typeface="맑은 고딕"/>
+              </a:rPr>
+              <a:t>■ 신규 2시간 배송으로 소량 퀵배송과 대용량 예약배송 사이 공백 보완</a:t>
+            </a:r>
+          </a:p>
+        </p:txBody>
+      </p:sp>
+      <p:sp>
+        <p:nvSpPr>
+          <p:cNvPr id="4" name="TextBox 3"/>
+          <p:cNvSpPr txBox="1"/>
+          <p:nvPr/>
+        </p:nvSpPr>
+        <p:spPr>
+          <a:xfrm>
             <a:off x="8316000" y="846000"/>
             <a:ext cx="1188000" cy="216000"/>
           </a:xfrm>
@@ -4166,7 +4240,7 @@
       </p:sp>
       <p:sp>
         <p:nvSpPr>
-          <p:cNvPr id="4" name="TextBox 3"/>
+          <p:cNvPr id="5" name="TextBox 4"/>
           <p:cNvSpPr txBox="1"/>
           <p:nvPr/>
         </p:nvSpPr>
@@ -4203,7 +4277,7 @@
       </p:sp>
       <p:sp>
         <p:nvSpPr>
-          <p:cNvPr id="5" name="TextBox 4"/>
+          <p:cNvPr id="6" name="TextBox 5"/>
           <p:cNvSpPr txBox="1"/>
           <p:nvPr/>
         </p:nvSpPr>
@@ -4240,15 +4314,15 @@
       </p:sp>
       <p:graphicFrame>
         <p:nvGraphicFramePr>
-          <p:cNvPr id="6" name="Table 5"/>
+          <p:cNvPr id="7" name="Table 6"/>
           <p:cNvGraphicFramePr>
             <a:graphicFrameLocks noGrp="1"/>
           </p:cNvGraphicFramePr>
           <p:nvPr/>
         </p:nvGraphicFramePr>
         <p:xfrm>
-          <a:off x="406799" y="1080000"/>
-          <a:ext cx="9093599" cy="4140000"/>
+          <a:off x="406799" y="1475999"/>
+          <a:ext cx="9093599" cy="3816000"/>
         </p:xfrm>
         <a:graphic>
           <a:graphicData uri="http://schemas.openxmlformats.org/drawingml/2006/table">
@@ -4263,7 +4337,7 @@
                 <a:gridCol w="1440000"/>
                 <a:gridCol w="3225600"/>
               </a:tblGrid>
-              <a:tr h="690000">
+              <a:tr h="636000">
                 <a:tc>
                   <a:txBody>
                     <a:bodyPr wrap="square"/>
@@ -4390,7 +4464,7 @@
                   </a:tcPr>
                 </a:tc>
               </a:tr>
-              <a:tr h="690000">
+              <a:tr h="636000">
                 <a:tc>
                   <a:txBody>
                     <a:bodyPr wrap="square"/>
@@ -4518,7 +4592,7 @@
                   </a:tcPr>
                 </a:tc>
               </a:tr>
-              <a:tr h="690000">
+              <a:tr h="636000">
                 <a:tc>
                   <a:txBody>
                     <a:bodyPr wrap="square"/>
@@ -4646,7 +4720,7 @@
                   </a:tcPr>
                 </a:tc>
               </a:tr>
-              <a:tr h="690000">
+              <a:tr h="636000">
                 <a:tc>
                   <a:txBody>
                     <a:bodyPr wrap="square"/>
@@ -4773,7 +4847,7 @@
                   </a:tcPr>
                 </a:tc>
               </a:tr>
-              <a:tr h="690000">
+              <a:tr h="636000">
                 <a:tc>
                   <a:txBody>
                     <a:bodyPr wrap="square"/>
@@ -4902,7 +4976,7 @@
                   </a:tcPr>
                 </a:tc>
               </a:tr>
-              <a:tr h="690000">
+              <a:tr h="636000">
                 <a:tc>
                   <a:txBody>
                     <a:bodyPr wrap="square"/>
@@ -5109,6 +5183,43 @@
         </p:nvSpPr>
         <p:spPr>
           <a:xfrm>
+            <a:off x="417600" y="1044000"/>
+            <a:ext cx="7848000" cy="234000"/>
+          </a:xfrm>
+          <a:prstGeom prst="rect">
+            <a:avLst/>
+          </a:prstGeom>
+          <a:noFill/>
+        </p:spPr>
+        <p:txBody>
+          <a:bodyPr wrap="square" anchor="t" lIns="0" rIns="0" tIns="0" bIns="0">
+            <a:spAutoFit/>
+          </a:bodyPr>
+          <a:lstStyle/>
+          <a:p>
+            <a:pPr algn="l"/>
+            <a:r>
+              <a:rPr sz="1400" b="1">
+                <a:solidFill>
+                  <a:srgbClr val="000000"/>
+                </a:solidFill>
+                <a:latin typeface="맑은 고딕"/>
+                <a:ea typeface="맑은 고딕"/>
+                <a:cs typeface="맑은 고딕"/>
+              </a:rPr>
+              <a:t>■ 바로퀵 매출 197% 증가로 온디맨드 수요 실증 — 1시간/2시간 이원화 대응</a:t>
+            </a:r>
+          </a:p>
+        </p:txBody>
+      </p:sp>
+      <p:sp>
+        <p:nvSpPr>
+          <p:cNvPr id="4" name="TextBox 3"/>
+          <p:cNvSpPr txBox="1"/>
+          <p:nvPr/>
+        </p:nvSpPr>
+        <p:spPr>
+          <a:xfrm>
             <a:off x="8316000" y="846000"/>
             <a:ext cx="1188000" cy="216000"/>
           </a:xfrm>
@@ -5140,7 +5251,7 @@
       </p:sp>
       <p:sp>
         <p:nvSpPr>
-          <p:cNvPr id="4" name="TextBox 3"/>
+          <p:cNvPr id="5" name="TextBox 4"/>
           <p:cNvSpPr txBox="1"/>
           <p:nvPr/>
         </p:nvSpPr>
@@ -5177,7 +5288,7 @@
       </p:sp>
       <p:sp>
         <p:nvSpPr>
-          <p:cNvPr id="5" name="TextBox 4"/>
+          <p:cNvPr id="6" name="TextBox 5"/>
           <p:cNvSpPr txBox="1"/>
           <p:nvPr/>
         </p:nvSpPr>
@@ -5214,14 +5325,14 @@
       </p:sp>
       <p:sp>
         <p:nvSpPr>
-          <p:cNvPr id="6" name="TextBox 5"/>
+          <p:cNvPr id="7" name="TextBox 6"/>
           <p:cNvSpPr txBox="1"/>
           <p:nvPr/>
         </p:nvSpPr>
         <p:spPr>
           <a:xfrm>
-            <a:off x="406799" y="1080000"/>
-            <a:ext cx="9093600" cy="342000"/>
+            <a:off x="406799" y="1475999"/>
+            <a:ext cx="9093600" cy="345600"/>
           </a:xfrm>
           <a:prstGeom prst="rect">
             <a:avLst/>
@@ -5251,14 +5362,14 @@
       </p:sp>
       <p:sp>
         <p:nvSpPr>
-          <p:cNvPr id="7" name="TextBox 6"/>
+          <p:cNvPr id="8" name="TextBox 7"/>
           <p:cNvSpPr txBox="1"/>
           <p:nvPr/>
         </p:nvSpPr>
         <p:spPr>
           <a:xfrm>
-            <a:off x="406799" y="1422000"/>
-            <a:ext cx="9093600" cy="342000"/>
+            <a:off x="406799" y="1821599"/>
+            <a:ext cx="9093600" cy="345600"/>
           </a:xfrm>
           <a:prstGeom prst="rect">
             <a:avLst/>
@@ -5288,14 +5399,14 @@
       </p:sp>
       <p:sp>
         <p:nvSpPr>
-          <p:cNvPr id="8" name="TextBox 7"/>
+          <p:cNvPr id="9" name="TextBox 8"/>
           <p:cNvSpPr txBox="1"/>
           <p:nvPr/>
         </p:nvSpPr>
         <p:spPr>
           <a:xfrm>
-            <a:off x="406799" y="1764000"/>
-            <a:ext cx="9093600" cy="342000"/>
+            <a:off x="406799" y="2167200"/>
+            <a:ext cx="9093600" cy="345600"/>
           </a:xfrm>
           <a:prstGeom prst="rect">
             <a:avLst/>
@@ -5325,14 +5436,14 @@
       </p:sp>
       <p:sp>
         <p:nvSpPr>
-          <p:cNvPr id="9" name="TextBox 8"/>
+          <p:cNvPr id="10" name="TextBox 9"/>
           <p:cNvSpPr txBox="1"/>
           <p:nvPr/>
         </p:nvSpPr>
         <p:spPr>
           <a:xfrm>
-            <a:off x="406799" y="2106000"/>
-            <a:ext cx="9093600" cy="342000"/>
+            <a:off x="406799" y="2512800"/>
+            <a:ext cx="9093600" cy="345600"/>
           </a:xfrm>
           <a:prstGeom prst="rect">
             <a:avLst/>
@@ -5362,15 +5473,15 @@
       </p:sp>
       <p:graphicFrame>
         <p:nvGraphicFramePr>
-          <p:cNvPr id="10" name="Table 9"/>
+          <p:cNvPr id="11" name="Table 10"/>
           <p:cNvGraphicFramePr>
             <a:graphicFrameLocks noGrp="1"/>
           </p:cNvGraphicFramePr>
           <p:nvPr/>
         </p:nvGraphicFramePr>
         <p:xfrm>
-          <a:off x="406799" y="3024000"/>
-          <a:ext cx="9093600" cy="1368000"/>
+          <a:off x="406799" y="3038400"/>
+          <a:ext cx="9093600" cy="1296000"/>
         </p:xfrm>
         <a:graphic>
           <a:graphicData uri="http://schemas.openxmlformats.org/drawingml/2006/table">
@@ -5383,7 +5494,7 @@
                 <a:gridCol w="2160000"/>
                 <a:gridCol w="3693600"/>
               </a:tblGrid>
-              <a:tr h="342000">
+              <a:tr h="324000">
                 <a:tc>
                   <a:txBody>
                     <a:bodyPr wrap="square"/>
@@ -5460,7 +5571,7 @@
                   </a:tcPr>
                 </a:tc>
               </a:tr>
-              <a:tr h="342000">
+              <a:tr h="324000">
                 <a:tc>
                   <a:txBody>
                     <a:bodyPr wrap="square"/>
@@ -5537,7 +5648,7 @@
                   </a:tcPr>
                 </a:tc>
               </a:tr>
-              <a:tr h="342000">
+              <a:tr h="324000">
                 <a:tc>
                   <a:txBody>
                     <a:bodyPr wrap="square"/>
@@ -5614,7 +5725,7 @@
                   </a:tcPr>
                 </a:tc>
               </a:tr>
-              <a:tr h="342000">
+              <a:tr h="324000">
                 <a:tc>
                   <a:txBody>
                     <a:bodyPr wrap="square"/>
@@ -5769,6 +5880,43 @@
         </p:nvSpPr>
         <p:spPr>
           <a:xfrm>
+            <a:off x="417600" y="1044000"/>
+            <a:ext cx="7848000" cy="234000"/>
+          </a:xfrm>
+          <a:prstGeom prst="rect">
+            <a:avLst/>
+          </a:prstGeom>
+          <a:noFill/>
+        </p:spPr>
+        <p:txBody>
+          <a:bodyPr wrap="square" anchor="t" lIns="0" rIns="0" tIns="0" bIns="0">
+            <a:spAutoFit/>
+          </a:bodyPr>
+          <a:lstStyle/>
+          <a:p>
+            <a:pPr algn="l"/>
+            <a:r>
+              <a:rPr sz="1400" b="1">
+                <a:solidFill>
+                  <a:srgbClr val="000000"/>
+                </a:solidFill>
+                <a:latin typeface="맑은 고딕"/>
+                <a:ea typeface="맑은 고딕"/>
+                <a:cs typeface="맑은 고딕"/>
+              </a:rPr>
+              <a:t>■ 새벽 규제 하 낮 시간대 가동률 승부 — 연말 50여 개 점포 확대 목표</a:t>
+            </a:r>
+          </a:p>
+        </p:txBody>
+      </p:sp>
+      <p:sp>
+        <p:nvSpPr>
+          <p:cNvPr id="4" name="TextBox 3"/>
+          <p:cNvSpPr txBox="1"/>
+          <p:nvPr/>
+        </p:nvSpPr>
+        <p:spPr>
+          <a:xfrm>
             <a:off x="374400" y="6443999"/>
             <a:ext cx="6480000" cy="198000"/>
           </a:xfrm>
@@ -5800,7 +5948,7 @@
       </p:sp>
       <p:sp>
         <p:nvSpPr>
-          <p:cNvPr id="4" name="TextBox 3"/>
+          <p:cNvPr id="5" name="TextBox 4"/>
           <p:cNvSpPr txBox="1"/>
           <p:nvPr/>
         </p:nvSpPr>
@@ -5837,14 +5985,14 @@
       </p:sp>
       <p:sp>
         <p:nvSpPr>
-          <p:cNvPr id="5" name="TextBox 4"/>
+          <p:cNvPr id="6" name="TextBox 5"/>
           <p:cNvSpPr txBox="1"/>
           <p:nvPr/>
         </p:nvSpPr>
         <p:spPr>
           <a:xfrm>
-            <a:off x="406799" y="1080000"/>
-            <a:ext cx="9093600" cy="342000"/>
+            <a:off x="406799" y="1475999"/>
+            <a:ext cx="9093600" cy="345600"/>
           </a:xfrm>
           <a:prstGeom prst="rect">
             <a:avLst/>
@@ -5874,14 +6022,14 @@
       </p:sp>
       <p:sp>
         <p:nvSpPr>
-          <p:cNvPr id="6" name="TextBox 5"/>
+          <p:cNvPr id="7" name="TextBox 6"/>
           <p:cNvSpPr txBox="1"/>
           <p:nvPr/>
         </p:nvSpPr>
         <p:spPr>
           <a:xfrm>
-            <a:off x="658800" y="1422000"/>
-            <a:ext cx="8841600" cy="342000"/>
+            <a:off x="658800" y="1821599"/>
+            <a:ext cx="8841600" cy="345600"/>
           </a:xfrm>
           <a:prstGeom prst="rect">
             <a:avLst/>
@@ -5911,14 +6059,14 @@
       </p:sp>
       <p:sp>
         <p:nvSpPr>
-          <p:cNvPr id="7" name="TextBox 6"/>
+          <p:cNvPr id="8" name="TextBox 7"/>
           <p:cNvSpPr txBox="1"/>
           <p:nvPr/>
         </p:nvSpPr>
         <p:spPr>
           <a:xfrm>
-            <a:off x="406799" y="1764000"/>
-            <a:ext cx="9093600" cy="342000"/>
+            <a:off x="406799" y="2167200"/>
+            <a:ext cx="9093600" cy="345600"/>
           </a:xfrm>
           <a:prstGeom prst="rect">
             <a:avLst/>
@@ -5948,14 +6096,14 @@
       </p:sp>
       <p:sp>
         <p:nvSpPr>
-          <p:cNvPr id="8" name="TextBox 7"/>
+          <p:cNvPr id="9" name="TextBox 8"/>
           <p:cNvSpPr txBox="1"/>
           <p:nvPr/>
         </p:nvSpPr>
         <p:spPr>
           <a:xfrm>
-            <a:off x="406799" y="2106000"/>
-            <a:ext cx="9093600" cy="342000"/>
+            <a:off x="406799" y="2512800"/>
+            <a:ext cx="9093600" cy="345600"/>
           </a:xfrm>
           <a:prstGeom prst="rect">
             <a:avLst/>
@@ -5985,15 +6133,15 @@
       </p:sp>
       <p:graphicFrame>
         <p:nvGraphicFramePr>
-          <p:cNvPr id="9" name="Table 8"/>
+          <p:cNvPr id="10" name="Table 9"/>
           <p:cNvGraphicFramePr>
             <a:graphicFrameLocks noGrp="1"/>
           </p:cNvGraphicFramePr>
           <p:nvPr/>
         </p:nvGraphicFramePr>
         <p:xfrm>
-          <a:off x="406799" y="3168000"/>
-          <a:ext cx="9093600" cy="1584000"/>
+          <a:off x="406799" y="3038400"/>
+          <a:ext cx="9093600" cy="1512000"/>
         </p:xfrm>
         <a:graphic>
           <a:graphicData uri="http://schemas.openxmlformats.org/drawingml/2006/table">
@@ -6005,7 +6153,7 @@
                 <a:gridCol w="1800000"/>
                 <a:gridCol w="7293600"/>
               </a:tblGrid>
-              <a:tr h="316800">
+              <a:tr h="302400">
                 <a:tc>
                   <a:txBody>
                     <a:bodyPr wrap="square"/>
@@ -6057,7 +6205,7 @@
                   </a:tcPr>
                 </a:tc>
               </a:tr>
-              <a:tr h="316800">
+              <a:tr h="302400">
                 <a:tc>
                   <a:txBody>
                     <a:bodyPr wrap="square"/>
@@ -6109,7 +6257,7 @@
                   </a:tcPr>
                 </a:tc>
               </a:tr>
-              <a:tr h="316800">
+              <a:tr h="302400">
                 <a:tc>
                   <a:txBody>
                     <a:bodyPr wrap="square"/>
@@ -6161,7 +6309,7 @@
                   </a:tcPr>
                 </a:tc>
               </a:tr>
-              <a:tr h="316800">
+              <a:tr h="302400">
                 <a:tc>
                   <a:txBody>
                     <a:bodyPr wrap="square"/>
@@ -6213,7 +6361,7 @@
                   </a:tcPr>
                 </a:tc>
               </a:tr>
-              <a:tr h="316800">
+              <a:tr h="302400">
                 <a:tc>
                   <a:txBody>
                     <a:bodyPr wrap="square"/>

--- a/reports/ssg-delivery-report.pptx
+++ b/reports/ssg-delivery-report.pptx
@@ -3529,7 +3529,7 @@
           <a:p>
             <a:pPr algn="l"/>
             <a:r>
-              <a:rPr sz="2800" b="1">
+              <a:rPr sz="2000" b="1">
                 <a:solidFill>
                   <a:srgbClr val="222222"/>
                 </a:solidFill>
@@ -3540,7 +3540,7 @@
               <a:t>[핵심요약①] </a:t>
             </a:r>
             <a:r>
-              <a:rPr sz="2800" b="1">
+              <a:rPr sz="2000" b="1">
                 <a:solidFill>
                   <a:srgbClr val="222222"/>
                 </a:solidFill>
@@ -3855,6 +3855,26 @@
                     </a:p>
                   </a:txBody>
                   <a:tcPr anchor="ctr" marL="36000" marR="36000" marT="0" marB="0">
+                    <a:lnL w="9525" cap="flat">
+                      <a:solidFill>
+                        <a:srgbClr val="BFBFBF"/>
+                      </a:solidFill>
+                    </a:lnL>
+                    <a:lnR w="9525" cap="flat">
+                      <a:solidFill>
+                        <a:srgbClr val="BFBFBF"/>
+                      </a:solidFill>
+                    </a:lnR>
+                    <a:lnT w="9525" cap="flat">
+                      <a:solidFill>
+                        <a:srgbClr val="BFBFBF"/>
+                      </a:solidFill>
+                    </a:lnT>
+                    <a:lnB w="9525" cap="flat">
+                      <a:solidFill>
+                        <a:srgbClr val="BFBFBF"/>
+                      </a:solidFill>
+                    </a:lnB>
                     <a:solidFill>
                       <a:srgbClr val="EAEEF6"/>
                     </a:solidFill>
@@ -3880,6 +3900,26 @@
                     </a:p>
                   </a:txBody>
                   <a:tcPr anchor="ctr" marL="36000" marR="36000" marT="0" marB="0">
+                    <a:lnL w="9525" cap="flat">
+                      <a:solidFill>
+                        <a:srgbClr val="BFBFBF"/>
+                      </a:solidFill>
+                    </a:lnL>
+                    <a:lnR w="9525" cap="flat">
+                      <a:solidFill>
+                        <a:srgbClr val="BFBFBF"/>
+                      </a:solidFill>
+                    </a:lnR>
+                    <a:lnT w="9525" cap="flat">
+                      <a:solidFill>
+                        <a:srgbClr val="BFBFBF"/>
+                      </a:solidFill>
+                    </a:lnT>
+                    <a:lnB w="9525" cap="flat">
+                      <a:solidFill>
+                        <a:srgbClr val="BFBFBF"/>
+                      </a:solidFill>
+                    </a:lnB>
                     <a:solidFill>
                       <a:srgbClr val="EAEEF6"/>
                     </a:solidFill>
@@ -3907,6 +3947,26 @@
                     </a:p>
                   </a:txBody>
                   <a:tcPr anchor="ctr" marL="36000" marR="36000" marT="0" marB="0">
+                    <a:lnL w="9525" cap="flat">
+                      <a:solidFill>
+                        <a:srgbClr val="BFBFBF"/>
+                      </a:solidFill>
+                    </a:lnL>
+                    <a:lnR w="9525" cap="flat">
+                      <a:solidFill>
+                        <a:srgbClr val="BFBFBF"/>
+                      </a:solidFill>
+                    </a:lnR>
+                    <a:lnT w="9525" cap="flat">
+                      <a:solidFill>
+                        <a:srgbClr val="BFBFBF"/>
+                      </a:solidFill>
+                    </a:lnT>
+                    <a:lnB w="9525" cap="flat">
+                      <a:solidFill>
+                        <a:srgbClr val="BFBFBF"/>
+                      </a:solidFill>
+                    </a:lnB>
                     <a:solidFill>
                       <a:srgbClr val="FFFFFF"/>
                     </a:solidFill>
@@ -3932,6 +3992,26 @@
                     </a:p>
                   </a:txBody>
                   <a:tcPr anchor="ctr" marL="36000" marR="36000" marT="0" marB="0">
+                    <a:lnL w="9525" cap="flat">
+                      <a:solidFill>
+                        <a:srgbClr val="BFBFBF"/>
+                      </a:solidFill>
+                    </a:lnL>
+                    <a:lnR w="9525" cap="flat">
+                      <a:solidFill>
+                        <a:srgbClr val="BFBFBF"/>
+                      </a:solidFill>
+                    </a:lnR>
+                    <a:lnT w="9525" cap="flat">
+                      <a:solidFill>
+                        <a:srgbClr val="BFBFBF"/>
+                      </a:solidFill>
+                    </a:lnT>
+                    <a:lnB w="9525" cap="flat">
+                      <a:solidFill>
+                        <a:srgbClr val="BFBFBF"/>
+                      </a:solidFill>
+                    </a:lnB>
                     <a:solidFill>
                       <a:srgbClr val="FFFFFF"/>
                     </a:solidFill>
@@ -3959,6 +4039,26 @@
                     </a:p>
                   </a:txBody>
                   <a:tcPr anchor="ctr" marL="36000" marR="36000" marT="0" marB="0">
+                    <a:lnL w="9525" cap="flat">
+                      <a:solidFill>
+                        <a:srgbClr val="BFBFBF"/>
+                      </a:solidFill>
+                    </a:lnL>
+                    <a:lnR w="9525" cap="flat">
+                      <a:solidFill>
+                        <a:srgbClr val="BFBFBF"/>
+                      </a:solidFill>
+                    </a:lnR>
+                    <a:lnT w="9525" cap="flat">
+                      <a:solidFill>
+                        <a:srgbClr val="BFBFBF"/>
+                      </a:solidFill>
+                    </a:lnT>
+                    <a:lnB w="9525" cap="flat">
+                      <a:solidFill>
+                        <a:srgbClr val="BFBFBF"/>
+                      </a:solidFill>
+                    </a:lnB>
                     <a:solidFill>
                       <a:srgbClr val="FFFFFF"/>
                     </a:solidFill>
@@ -3984,6 +4084,26 @@
                     </a:p>
                   </a:txBody>
                   <a:tcPr anchor="ctr" marL="36000" marR="36000" marT="0" marB="0">
+                    <a:lnL w="9525" cap="flat">
+                      <a:solidFill>
+                        <a:srgbClr val="BFBFBF"/>
+                      </a:solidFill>
+                    </a:lnL>
+                    <a:lnR w="9525" cap="flat">
+                      <a:solidFill>
+                        <a:srgbClr val="BFBFBF"/>
+                      </a:solidFill>
+                    </a:lnR>
+                    <a:lnT w="9525" cap="flat">
+                      <a:solidFill>
+                        <a:srgbClr val="BFBFBF"/>
+                      </a:solidFill>
+                    </a:lnT>
+                    <a:lnB w="9525" cap="flat">
+                      <a:solidFill>
+                        <a:srgbClr val="BFBFBF"/>
+                      </a:solidFill>
+                    </a:lnB>
                     <a:solidFill>
                       <a:srgbClr val="FFFFFF"/>
                     </a:solidFill>
@@ -4011,6 +4131,26 @@
                     </a:p>
                   </a:txBody>
                   <a:tcPr anchor="ctr" marL="36000" marR="36000" marT="0" marB="0">
+                    <a:lnL w="9525" cap="flat">
+                      <a:solidFill>
+                        <a:srgbClr val="BFBFBF"/>
+                      </a:solidFill>
+                    </a:lnL>
+                    <a:lnR w="9525" cap="flat">
+                      <a:solidFill>
+                        <a:srgbClr val="BFBFBF"/>
+                      </a:solidFill>
+                    </a:lnR>
+                    <a:lnT w="9525" cap="flat">
+                      <a:solidFill>
+                        <a:srgbClr val="BFBFBF"/>
+                      </a:solidFill>
+                    </a:lnT>
+                    <a:lnB w="9525" cap="flat">
+                      <a:solidFill>
+                        <a:srgbClr val="BFBFBF"/>
+                      </a:solidFill>
+                    </a:lnB>
                     <a:solidFill>
                       <a:srgbClr val="FFFFFF"/>
                     </a:solidFill>
@@ -4036,6 +4176,26 @@
                     </a:p>
                   </a:txBody>
                   <a:tcPr anchor="ctr" marL="36000" marR="36000" marT="0" marB="0">
+                    <a:lnL w="9525" cap="flat">
+                      <a:solidFill>
+                        <a:srgbClr val="BFBFBF"/>
+                      </a:solidFill>
+                    </a:lnL>
+                    <a:lnR w="9525" cap="flat">
+                      <a:solidFill>
+                        <a:srgbClr val="BFBFBF"/>
+                      </a:solidFill>
+                    </a:lnR>
+                    <a:lnT w="9525" cap="flat">
+                      <a:solidFill>
+                        <a:srgbClr val="BFBFBF"/>
+                      </a:solidFill>
+                    </a:lnT>
+                    <a:lnB w="9525" cap="flat">
+                      <a:solidFill>
+                        <a:srgbClr val="BFBFBF"/>
+                      </a:solidFill>
+                    </a:lnB>
                     <a:solidFill>
                       <a:srgbClr val="FFFFFF"/>
                     </a:solidFill>
@@ -4063,6 +4223,26 @@
                     </a:p>
                   </a:txBody>
                   <a:tcPr anchor="ctr" marL="36000" marR="36000" marT="0" marB="0">
+                    <a:lnL w="9525" cap="flat">
+                      <a:solidFill>
+                        <a:srgbClr val="BFBFBF"/>
+                      </a:solidFill>
+                    </a:lnL>
+                    <a:lnR w="9525" cap="flat">
+                      <a:solidFill>
+                        <a:srgbClr val="BFBFBF"/>
+                      </a:solidFill>
+                    </a:lnR>
+                    <a:lnT w="9525" cap="flat">
+                      <a:solidFill>
+                        <a:srgbClr val="BFBFBF"/>
+                      </a:solidFill>
+                    </a:lnT>
+                    <a:lnB w="9525" cap="flat">
+                      <a:solidFill>
+                        <a:srgbClr val="BFBFBF"/>
+                      </a:solidFill>
+                    </a:lnB>
                     <a:solidFill>
                       <a:srgbClr val="FFFFFF"/>
                     </a:solidFill>
@@ -4088,6 +4268,26 @@
                     </a:p>
                   </a:txBody>
                   <a:tcPr anchor="ctr" marL="36000" marR="36000" marT="0" marB="0">
+                    <a:lnL w="9525" cap="flat">
+                      <a:solidFill>
+                        <a:srgbClr val="BFBFBF"/>
+                      </a:solidFill>
+                    </a:lnL>
+                    <a:lnR w="9525" cap="flat">
+                      <a:solidFill>
+                        <a:srgbClr val="BFBFBF"/>
+                      </a:solidFill>
+                    </a:lnR>
+                    <a:lnT w="9525" cap="flat">
+                      <a:solidFill>
+                        <a:srgbClr val="BFBFBF"/>
+                      </a:solidFill>
+                    </a:lnT>
+                    <a:lnB w="9525" cap="flat">
+                      <a:solidFill>
+                        <a:srgbClr val="BFBFBF"/>
+                      </a:solidFill>
+                    </a:lnB>
                     <a:solidFill>
                       <a:srgbClr val="FFFFFF"/>
                     </a:solidFill>
@@ -4140,7 +4340,7 @@
           <a:p>
             <a:pPr algn="l"/>
             <a:r>
-              <a:rPr sz="2800" b="1">
+              <a:rPr sz="2000" b="1">
                 <a:solidFill>
                   <a:srgbClr val="222222"/>
                 </a:solidFill>
@@ -4151,7 +4351,7 @@
               <a:t>[서비스현황②] </a:t>
             </a:r>
             <a:r>
-              <a:rPr sz="2800" b="1">
+              <a:rPr sz="2000" b="1">
                 <a:solidFill>
                   <a:srgbClr val="222222"/>
                 </a:solidFill>
@@ -4358,6 +4558,26 @@
                     </a:p>
                   </a:txBody>
                   <a:tcPr anchor="ctr" marL="36000" marR="36000" marT="0" marB="0">
+                    <a:lnL w="9525" cap="flat">
+                      <a:solidFill>
+                        <a:srgbClr val="BFBFBF"/>
+                      </a:solidFill>
+                    </a:lnL>
+                    <a:lnR w="9525" cap="flat">
+                      <a:solidFill>
+                        <a:srgbClr val="BFBFBF"/>
+                      </a:solidFill>
+                    </a:lnR>
+                    <a:lnT w="9525" cap="flat">
+                      <a:solidFill>
+                        <a:srgbClr val="BFBFBF"/>
+                      </a:solidFill>
+                    </a:lnT>
+                    <a:lnB w="9525" cap="flat">
+                      <a:solidFill>
+                        <a:srgbClr val="BFBFBF"/>
+                      </a:solidFill>
+                    </a:lnB>
                     <a:solidFill>
                       <a:srgbClr val="EAEEF6"/>
                     </a:solidFill>
@@ -4383,6 +4603,26 @@
                     </a:p>
                   </a:txBody>
                   <a:tcPr anchor="ctr" marL="36000" marR="36000" marT="0" marB="0">
+                    <a:lnL w="9525" cap="flat">
+                      <a:solidFill>
+                        <a:srgbClr val="BFBFBF"/>
+                      </a:solidFill>
+                    </a:lnL>
+                    <a:lnR w="9525" cap="flat">
+                      <a:solidFill>
+                        <a:srgbClr val="BFBFBF"/>
+                      </a:solidFill>
+                    </a:lnR>
+                    <a:lnT w="9525" cap="flat">
+                      <a:solidFill>
+                        <a:srgbClr val="BFBFBF"/>
+                      </a:solidFill>
+                    </a:lnT>
+                    <a:lnB w="9525" cap="flat">
+                      <a:solidFill>
+                        <a:srgbClr val="BFBFBF"/>
+                      </a:solidFill>
+                    </a:lnB>
                     <a:solidFill>
                       <a:srgbClr val="EAEEF6"/>
                     </a:solidFill>
@@ -4408,6 +4648,26 @@
                     </a:p>
                   </a:txBody>
                   <a:tcPr anchor="ctr" marL="36000" marR="36000" marT="0" marB="0">
+                    <a:lnL w="9525" cap="flat">
+                      <a:solidFill>
+                        <a:srgbClr val="BFBFBF"/>
+                      </a:solidFill>
+                    </a:lnL>
+                    <a:lnR w="9525" cap="flat">
+                      <a:solidFill>
+                        <a:srgbClr val="BFBFBF"/>
+                      </a:solidFill>
+                    </a:lnR>
+                    <a:lnT w="9525" cap="flat">
+                      <a:solidFill>
+                        <a:srgbClr val="BFBFBF"/>
+                      </a:solidFill>
+                    </a:lnT>
+                    <a:lnB w="9525" cap="flat">
+                      <a:solidFill>
+                        <a:srgbClr val="BFBFBF"/>
+                      </a:solidFill>
+                    </a:lnB>
                     <a:solidFill>
                       <a:srgbClr val="EAEEF6"/>
                     </a:solidFill>
@@ -4433,6 +4693,26 @@
                     </a:p>
                   </a:txBody>
                   <a:tcPr anchor="ctr" marL="36000" marR="36000" marT="0" marB="0">
+                    <a:lnL w="9525" cap="flat">
+                      <a:solidFill>
+                        <a:srgbClr val="BFBFBF"/>
+                      </a:solidFill>
+                    </a:lnL>
+                    <a:lnR w="9525" cap="flat">
+                      <a:solidFill>
+                        <a:srgbClr val="BFBFBF"/>
+                      </a:solidFill>
+                    </a:lnR>
+                    <a:lnT w="9525" cap="flat">
+                      <a:solidFill>
+                        <a:srgbClr val="BFBFBF"/>
+                      </a:solidFill>
+                    </a:lnT>
+                    <a:lnB w="9525" cap="flat">
+                      <a:solidFill>
+                        <a:srgbClr val="BFBFBF"/>
+                      </a:solidFill>
+                    </a:lnB>
                     <a:solidFill>
                       <a:srgbClr val="EAEEF6"/>
                     </a:solidFill>
@@ -4458,6 +4738,26 @@
                     </a:p>
                   </a:txBody>
                   <a:tcPr anchor="ctr" marL="36000" marR="36000" marT="0" marB="0">
+                    <a:lnL w="9525" cap="flat">
+                      <a:solidFill>
+                        <a:srgbClr val="BFBFBF"/>
+                      </a:solidFill>
+                    </a:lnL>
+                    <a:lnR w="9525" cap="flat">
+                      <a:solidFill>
+                        <a:srgbClr val="BFBFBF"/>
+                      </a:solidFill>
+                    </a:lnR>
+                    <a:lnT w="9525" cap="flat">
+                      <a:solidFill>
+                        <a:srgbClr val="BFBFBF"/>
+                      </a:solidFill>
+                    </a:lnT>
+                    <a:lnB w="9525" cap="flat">
+                      <a:solidFill>
+                        <a:srgbClr val="BFBFBF"/>
+                      </a:solidFill>
+                    </a:lnB>
                     <a:solidFill>
                       <a:srgbClr val="EAEEF6"/>
                     </a:solidFill>
@@ -4485,6 +4785,26 @@
                     </a:p>
                   </a:txBody>
                   <a:tcPr anchor="ctr" marL="36000" marR="36000" marT="0" marB="0">
+                    <a:lnL w="9525" cap="flat">
+                      <a:solidFill>
+                        <a:srgbClr val="BFBFBF"/>
+                      </a:solidFill>
+                    </a:lnL>
+                    <a:lnR w="9525" cap="flat">
+                      <a:solidFill>
+                        <a:srgbClr val="BFBFBF"/>
+                      </a:solidFill>
+                    </a:lnR>
+                    <a:lnT w="9525" cap="flat">
+                      <a:solidFill>
+                        <a:srgbClr val="BFBFBF"/>
+                      </a:solidFill>
+                    </a:lnT>
+                    <a:lnB w="9525" cap="flat">
+                      <a:solidFill>
+                        <a:srgbClr val="BFBFBF"/>
+                      </a:solidFill>
+                    </a:lnB>
                     <a:solidFill>
                       <a:srgbClr val="FFFFFF"/>
                     </a:solidFill>
@@ -4511,6 +4831,26 @@
                     </a:p>
                   </a:txBody>
                   <a:tcPr anchor="ctr" marL="36000" marR="36000" marT="0" marB="0">
+                    <a:lnL w="9525" cap="flat">
+                      <a:solidFill>
+                        <a:srgbClr val="BFBFBF"/>
+                      </a:solidFill>
+                    </a:lnL>
+                    <a:lnR w="9525" cap="flat">
+                      <a:solidFill>
+                        <a:srgbClr val="BFBFBF"/>
+                      </a:solidFill>
+                    </a:lnR>
+                    <a:lnT w="9525" cap="flat">
+                      <a:solidFill>
+                        <a:srgbClr val="BFBFBF"/>
+                      </a:solidFill>
+                    </a:lnT>
+                    <a:lnB w="9525" cap="flat">
+                      <a:solidFill>
+                        <a:srgbClr val="BFBFBF"/>
+                      </a:solidFill>
+                    </a:lnB>
                     <a:solidFill>
                       <a:srgbClr val="FFFFFF"/>
                     </a:solidFill>
@@ -4536,6 +4876,26 @@
                     </a:p>
                   </a:txBody>
                   <a:tcPr anchor="ctr" marL="36000" marR="36000" marT="0" marB="0">
+                    <a:lnL w="9525" cap="flat">
+                      <a:solidFill>
+                        <a:srgbClr val="BFBFBF"/>
+                      </a:solidFill>
+                    </a:lnL>
+                    <a:lnR w="9525" cap="flat">
+                      <a:solidFill>
+                        <a:srgbClr val="BFBFBF"/>
+                      </a:solidFill>
+                    </a:lnR>
+                    <a:lnT w="9525" cap="flat">
+                      <a:solidFill>
+                        <a:srgbClr val="BFBFBF"/>
+                      </a:solidFill>
+                    </a:lnT>
+                    <a:lnB w="9525" cap="flat">
+                      <a:solidFill>
+                        <a:srgbClr val="BFBFBF"/>
+                      </a:solidFill>
+                    </a:lnB>
                     <a:solidFill>
                       <a:srgbClr val="FFFFFF"/>
                     </a:solidFill>
@@ -4561,6 +4921,26 @@
                     </a:p>
                   </a:txBody>
                   <a:tcPr anchor="ctr" marL="36000" marR="36000" marT="0" marB="0">
+                    <a:lnL w="9525" cap="flat">
+                      <a:solidFill>
+                        <a:srgbClr val="BFBFBF"/>
+                      </a:solidFill>
+                    </a:lnL>
+                    <a:lnR w="9525" cap="flat">
+                      <a:solidFill>
+                        <a:srgbClr val="BFBFBF"/>
+                      </a:solidFill>
+                    </a:lnR>
+                    <a:lnT w="9525" cap="flat">
+                      <a:solidFill>
+                        <a:srgbClr val="BFBFBF"/>
+                      </a:solidFill>
+                    </a:lnT>
+                    <a:lnB w="9525" cap="flat">
+                      <a:solidFill>
+                        <a:srgbClr val="BFBFBF"/>
+                      </a:solidFill>
+                    </a:lnB>
                     <a:solidFill>
                       <a:srgbClr val="FFFFFF"/>
                     </a:solidFill>
@@ -4586,6 +4966,26 @@
                     </a:p>
                   </a:txBody>
                   <a:tcPr anchor="ctr" marL="36000" marR="36000" marT="0" marB="0">
+                    <a:lnL w="9525" cap="flat">
+                      <a:solidFill>
+                        <a:srgbClr val="BFBFBF"/>
+                      </a:solidFill>
+                    </a:lnL>
+                    <a:lnR w="9525" cap="flat">
+                      <a:solidFill>
+                        <a:srgbClr val="BFBFBF"/>
+                      </a:solidFill>
+                    </a:lnR>
+                    <a:lnT w="9525" cap="flat">
+                      <a:solidFill>
+                        <a:srgbClr val="BFBFBF"/>
+                      </a:solidFill>
+                    </a:lnT>
+                    <a:lnB w="9525" cap="flat">
+                      <a:solidFill>
+                        <a:srgbClr val="BFBFBF"/>
+                      </a:solidFill>
+                    </a:lnB>
                     <a:solidFill>
                       <a:srgbClr val="FFFFFF"/>
                     </a:solidFill>
@@ -4613,6 +5013,26 @@
                     </a:p>
                   </a:txBody>
                   <a:tcPr anchor="ctr" marL="36000" marR="36000" marT="0" marB="0">
+                    <a:lnL w="9525" cap="flat">
+                      <a:solidFill>
+                        <a:srgbClr val="BFBFBF"/>
+                      </a:solidFill>
+                    </a:lnL>
+                    <a:lnR w="9525" cap="flat">
+                      <a:solidFill>
+                        <a:srgbClr val="BFBFBF"/>
+                      </a:solidFill>
+                    </a:lnR>
+                    <a:lnT w="9525" cap="flat">
+                      <a:solidFill>
+                        <a:srgbClr val="BFBFBF"/>
+                      </a:solidFill>
+                    </a:lnT>
+                    <a:lnB w="9525" cap="flat">
+                      <a:solidFill>
+                        <a:srgbClr val="BFBFBF"/>
+                      </a:solidFill>
+                    </a:lnB>
                     <a:solidFill>
                       <a:srgbClr val="FFFFFF"/>
                     </a:solidFill>
@@ -4638,6 +5058,26 @@
                     </a:p>
                   </a:txBody>
                   <a:tcPr anchor="ctr" marL="36000" marR="36000" marT="0" marB="0">
+                    <a:lnL w="9525" cap="flat">
+                      <a:solidFill>
+                        <a:srgbClr val="BFBFBF"/>
+                      </a:solidFill>
+                    </a:lnL>
+                    <a:lnR w="9525" cap="flat">
+                      <a:solidFill>
+                        <a:srgbClr val="BFBFBF"/>
+                      </a:solidFill>
+                    </a:lnR>
+                    <a:lnT w="9525" cap="flat">
+                      <a:solidFill>
+                        <a:srgbClr val="BFBFBF"/>
+                      </a:solidFill>
+                    </a:lnT>
+                    <a:lnB w="9525" cap="flat">
+                      <a:solidFill>
+                        <a:srgbClr val="BFBFBF"/>
+                      </a:solidFill>
+                    </a:lnB>
                     <a:solidFill>
                       <a:srgbClr val="FFFFFF"/>
                     </a:solidFill>
@@ -4663,6 +5103,26 @@
                     </a:p>
                   </a:txBody>
                   <a:tcPr anchor="ctr" marL="36000" marR="36000" marT="0" marB="0">
+                    <a:lnL w="9525" cap="flat">
+                      <a:solidFill>
+                        <a:srgbClr val="BFBFBF"/>
+                      </a:solidFill>
+                    </a:lnL>
+                    <a:lnR w="9525" cap="flat">
+                      <a:solidFill>
+                        <a:srgbClr val="BFBFBF"/>
+                      </a:solidFill>
+                    </a:lnR>
+                    <a:lnT w="9525" cap="flat">
+                      <a:solidFill>
+                        <a:srgbClr val="BFBFBF"/>
+                      </a:solidFill>
+                    </a:lnT>
+                    <a:lnB w="9525" cap="flat">
+                      <a:solidFill>
+                        <a:srgbClr val="BFBFBF"/>
+                      </a:solidFill>
+                    </a:lnB>
                     <a:solidFill>
                       <a:srgbClr val="FFFFFF"/>
                     </a:solidFill>
@@ -4688,6 +5148,26 @@
                     </a:p>
                   </a:txBody>
                   <a:tcPr anchor="ctr" marL="36000" marR="36000" marT="0" marB="0">
+                    <a:lnL w="9525" cap="flat">
+                      <a:solidFill>
+                        <a:srgbClr val="BFBFBF"/>
+                      </a:solidFill>
+                    </a:lnL>
+                    <a:lnR w="9525" cap="flat">
+                      <a:solidFill>
+                        <a:srgbClr val="BFBFBF"/>
+                      </a:solidFill>
+                    </a:lnR>
+                    <a:lnT w="9525" cap="flat">
+                      <a:solidFill>
+                        <a:srgbClr val="BFBFBF"/>
+                      </a:solidFill>
+                    </a:lnT>
+                    <a:lnB w="9525" cap="flat">
+                      <a:solidFill>
+                        <a:srgbClr val="BFBFBF"/>
+                      </a:solidFill>
+                    </a:lnB>
                     <a:solidFill>
                       <a:srgbClr val="FFFFFF"/>
                     </a:solidFill>
@@ -4714,6 +5194,26 @@
                     </a:p>
                   </a:txBody>
                   <a:tcPr anchor="ctr" marL="36000" marR="36000" marT="0" marB="0">
+                    <a:lnL w="9525" cap="flat">
+                      <a:solidFill>
+                        <a:srgbClr val="BFBFBF"/>
+                      </a:solidFill>
+                    </a:lnL>
+                    <a:lnR w="9525" cap="flat">
+                      <a:solidFill>
+                        <a:srgbClr val="BFBFBF"/>
+                      </a:solidFill>
+                    </a:lnR>
+                    <a:lnT w="9525" cap="flat">
+                      <a:solidFill>
+                        <a:srgbClr val="BFBFBF"/>
+                      </a:solidFill>
+                    </a:lnT>
+                    <a:lnB w="9525" cap="flat">
+                      <a:solidFill>
+                        <a:srgbClr val="BFBFBF"/>
+                      </a:solidFill>
+                    </a:lnB>
                     <a:solidFill>
                       <a:srgbClr val="FFFFFF"/>
                     </a:solidFill>
@@ -4741,6 +5241,26 @@
                     </a:p>
                   </a:txBody>
                   <a:tcPr anchor="ctr" marL="36000" marR="36000" marT="0" marB="0">
+                    <a:lnL w="9525" cap="flat">
+                      <a:solidFill>
+                        <a:srgbClr val="BFBFBF"/>
+                      </a:solidFill>
+                    </a:lnL>
+                    <a:lnR w="9525" cap="flat">
+                      <a:solidFill>
+                        <a:srgbClr val="BFBFBF"/>
+                      </a:solidFill>
+                    </a:lnR>
+                    <a:lnT w="9525" cap="flat">
+                      <a:solidFill>
+                        <a:srgbClr val="BFBFBF"/>
+                      </a:solidFill>
+                    </a:lnT>
+                    <a:lnB w="9525" cap="flat">
+                      <a:solidFill>
+                        <a:srgbClr val="BFBFBF"/>
+                      </a:solidFill>
+                    </a:lnB>
                     <a:solidFill>
                       <a:srgbClr val="FFFFFF"/>
                     </a:solidFill>
@@ -4766,6 +5286,26 @@
                     </a:p>
                   </a:txBody>
                   <a:tcPr anchor="ctr" marL="36000" marR="36000" marT="0" marB="0">
+                    <a:lnL w="9525" cap="flat">
+                      <a:solidFill>
+                        <a:srgbClr val="BFBFBF"/>
+                      </a:solidFill>
+                    </a:lnL>
+                    <a:lnR w="9525" cap="flat">
+                      <a:solidFill>
+                        <a:srgbClr val="BFBFBF"/>
+                      </a:solidFill>
+                    </a:lnR>
+                    <a:lnT w="9525" cap="flat">
+                      <a:solidFill>
+                        <a:srgbClr val="BFBFBF"/>
+                      </a:solidFill>
+                    </a:lnT>
+                    <a:lnB w="9525" cap="flat">
+                      <a:solidFill>
+                        <a:srgbClr val="BFBFBF"/>
+                      </a:solidFill>
+                    </a:lnB>
                     <a:solidFill>
                       <a:srgbClr val="FFFFFF"/>
                     </a:solidFill>
@@ -4791,6 +5331,26 @@
                     </a:p>
                   </a:txBody>
                   <a:tcPr anchor="ctr" marL="36000" marR="36000" marT="0" marB="0">
+                    <a:lnL w="9525" cap="flat">
+                      <a:solidFill>
+                        <a:srgbClr val="BFBFBF"/>
+                      </a:solidFill>
+                    </a:lnL>
+                    <a:lnR w="9525" cap="flat">
+                      <a:solidFill>
+                        <a:srgbClr val="BFBFBF"/>
+                      </a:solidFill>
+                    </a:lnR>
+                    <a:lnT w="9525" cap="flat">
+                      <a:solidFill>
+                        <a:srgbClr val="BFBFBF"/>
+                      </a:solidFill>
+                    </a:lnT>
+                    <a:lnB w="9525" cap="flat">
+                      <a:solidFill>
+                        <a:srgbClr val="BFBFBF"/>
+                      </a:solidFill>
+                    </a:lnB>
                     <a:solidFill>
                       <a:srgbClr val="FFFFFF"/>
                     </a:solidFill>
@@ -4816,6 +5376,26 @@
                     </a:p>
                   </a:txBody>
                   <a:tcPr anchor="ctr" marL="36000" marR="36000" marT="0" marB="0">
+                    <a:lnL w="9525" cap="flat">
+                      <a:solidFill>
+                        <a:srgbClr val="BFBFBF"/>
+                      </a:solidFill>
+                    </a:lnL>
+                    <a:lnR w="9525" cap="flat">
+                      <a:solidFill>
+                        <a:srgbClr val="BFBFBF"/>
+                      </a:solidFill>
+                    </a:lnR>
+                    <a:lnT w="9525" cap="flat">
+                      <a:solidFill>
+                        <a:srgbClr val="BFBFBF"/>
+                      </a:solidFill>
+                    </a:lnT>
+                    <a:lnB w="9525" cap="flat">
+                      <a:solidFill>
+                        <a:srgbClr val="BFBFBF"/>
+                      </a:solidFill>
+                    </a:lnB>
                     <a:solidFill>
                       <a:srgbClr val="FFFFFF"/>
                     </a:solidFill>
@@ -4841,6 +5421,26 @@
                     </a:p>
                   </a:txBody>
                   <a:tcPr anchor="ctr" marL="36000" marR="36000" marT="0" marB="0">
+                    <a:lnL w="9525" cap="flat">
+                      <a:solidFill>
+                        <a:srgbClr val="BFBFBF"/>
+                      </a:solidFill>
+                    </a:lnL>
+                    <a:lnR w="9525" cap="flat">
+                      <a:solidFill>
+                        <a:srgbClr val="BFBFBF"/>
+                      </a:solidFill>
+                    </a:lnR>
+                    <a:lnT w="9525" cap="flat">
+                      <a:solidFill>
+                        <a:srgbClr val="BFBFBF"/>
+                      </a:solidFill>
+                    </a:lnT>
+                    <a:lnB w="9525" cap="flat">
+                      <a:solidFill>
+                        <a:srgbClr val="BFBFBF"/>
+                      </a:solidFill>
+                    </a:lnB>
                     <a:solidFill>
                       <a:srgbClr val="FFFFFF"/>
                     </a:solidFill>
@@ -4868,6 +5468,26 @@
                     </a:p>
                   </a:txBody>
                   <a:tcPr anchor="ctr" marL="36000" marR="36000" marT="0" marB="0">
+                    <a:lnL w="9525" cap="flat">
+                      <a:solidFill>
+                        <a:srgbClr val="BFBFBF"/>
+                      </a:solidFill>
+                    </a:lnL>
+                    <a:lnR w="9525" cap="flat">
+                      <a:solidFill>
+                        <a:srgbClr val="BFBFBF"/>
+                      </a:solidFill>
+                    </a:lnR>
+                    <a:lnT w="9525" cap="flat">
+                      <a:solidFill>
+                        <a:srgbClr val="BFBFBF"/>
+                      </a:solidFill>
+                    </a:lnT>
+                    <a:lnB w="9525" cap="flat">
+                      <a:solidFill>
+                        <a:srgbClr val="BFBFBF"/>
+                      </a:solidFill>
+                    </a:lnB>
                     <a:solidFill>
                       <a:srgbClr val="FFFFFF"/>
                     </a:solidFill>
@@ -4894,6 +5514,26 @@
                     </a:p>
                   </a:txBody>
                   <a:tcPr anchor="ctr" marL="36000" marR="36000" marT="0" marB="0">
+                    <a:lnL w="9525" cap="flat">
+                      <a:solidFill>
+                        <a:srgbClr val="BFBFBF"/>
+                      </a:solidFill>
+                    </a:lnL>
+                    <a:lnR w="9525" cap="flat">
+                      <a:solidFill>
+                        <a:srgbClr val="BFBFBF"/>
+                      </a:solidFill>
+                    </a:lnR>
+                    <a:lnT w="9525" cap="flat">
+                      <a:solidFill>
+                        <a:srgbClr val="BFBFBF"/>
+                      </a:solidFill>
+                    </a:lnT>
+                    <a:lnB w="9525" cap="flat">
+                      <a:solidFill>
+                        <a:srgbClr val="BFBFBF"/>
+                      </a:solidFill>
+                    </a:lnB>
                     <a:solidFill>
                       <a:srgbClr val="FFFFFF"/>
                     </a:solidFill>
@@ -4919,6 +5559,26 @@
                     </a:p>
                   </a:txBody>
                   <a:tcPr anchor="ctr" marL="36000" marR="36000" marT="0" marB="0">
+                    <a:lnL w="9525" cap="flat">
+                      <a:solidFill>
+                        <a:srgbClr val="BFBFBF"/>
+                      </a:solidFill>
+                    </a:lnL>
+                    <a:lnR w="9525" cap="flat">
+                      <a:solidFill>
+                        <a:srgbClr val="BFBFBF"/>
+                      </a:solidFill>
+                    </a:lnR>
+                    <a:lnT w="9525" cap="flat">
+                      <a:solidFill>
+                        <a:srgbClr val="BFBFBF"/>
+                      </a:solidFill>
+                    </a:lnT>
+                    <a:lnB w="9525" cap="flat">
+                      <a:solidFill>
+                        <a:srgbClr val="BFBFBF"/>
+                      </a:solidFill>
+                    </a:lnB>
                     <a:solidFill>
                       <a:srgbClr val="FFFFFF"/>
                     </a:solidFill>
@@ -4944,6 +5604,26 @@
                     </a:p>
                   </a:txBody>
                   <a:tcPr anchor="ctr" marL="36000" marR="36000" marT="0" marB="0">
+                    <a:lnL w="9525" cap="flat">
+                      <a:solidFill>
+                        <a:srgbClr val="BFBFBF"/>
+                      </a:solidFill>
+                    </a:lnL>
+                    <a:lnR w="9525" cap="flat">
+                      <a:solidFill>
+                        <a:srgbClr val="BFBFBF"/>
+                      </a:solidFill>
+                    </a:lnR>
+                    <a:lnT w="9525" cap="flat">
+                      <a:solidFill>
+                        <a:srgbClr val="BFBFBF"/>
+                      </a:solidFill>
+                    </a:lnT>
+                    <a:lnB w="9525" cap="flat">
+                      <a:solidFill>
+                        <a:srgbClr val="BFBFBF"/>
+                      </a:solidFill>
+                    </a:lnB>
                     <a:solidFill>
                       <a:srgbClr val="FFFFFF"/>
                     </a:solidFill>
@@ -4970,6 +5650,26 @@
                     </a:p>
                   </a:txBody>
                   <a:tcPr anchor="ctr" marL="36000" marR="36000" marT="0" marB="0">
+                    <a:lnL w="9525" cap="flat">
+                      <a:solidFill>
+                        <a:srgbClr val="BFBFBF"/>
+                      </a:solidFill>
+                    </a:lnL>
+                    <a:lnR w="9525" cap="flat">
+                      <a:solidFill>
+                        <a:srgbClr val="BFBFBF"/>
+                      </a:solidFill>
+                    </a:lnR>
+                    <a:lnT w="9525" cap="flat">
+                      <a:solidFill>
+                        <a:srgbClr val="BFBFBF"/>
+                      </a:solidFill>
+                    </a:lnT>
+                    <a:lnB w="9525" cap="flat">
+                      <a:solidFill>
+                        <a:srgbClr val="BFBFBF"/>
+                      </a:solidFill>
+                    </a:lnB>
                     <a:solidFill>
                       <a:srgbClr val="FFFFFF"/>
                     </a:solidFill>
@@ -4997,6 +5697,26 @@
                     </a:p>
                   </a:txBody>
                   <a:tcPr anchor="ctr" marL="36000" marR="36000" marT="0" marB="0">
+                    <a:lnL w="9525" cap="flat">
+                      <a:solidFill>
+                        <a:srgbClr val="BFBFBF"/>
+                      </a:solidFill>
+                    </a:lnL>
+                    <a:lnR w="9525" cap="flat">
+                      <a:solidFill>
+                        <a:srgbClr val="BFBFBF"/>
+                      </a:solidFill>
+                    </a:lnR>
+                    <a:lnT w="9525" cap="flat">
+                      <a:solidFill>
+                        <a:srgbClr val="BFBFBF"/>
+                      </a:solidFill>
+                    </a:lnT>
+                    <a:lnB w="9525" cap="flat">
+                      <a:solidFill>
+                        <a:srgbClr val="BFBFBF"/>
+                      </a:solidFill>
+                    </a:lnB>
                     <a:solidFill>
                       <a:srgbClr val="FFFFFF"/>
                     </a:solidFill>
@@ -5023,6 +5743,26 @@
                     </a:p>
                   </a:txBody>
                   <a:tcPr anchor="ctr" marL="36000" marR="36000" marT="0" marB="0">
+                    <a:lnL w="9525" cap="flat">
+                      <a:solidFill>
+                        <a:srgbClr val="BFBFBF"/>
+                      </a:solidFill>
+                    </a:lnL>
+                    <a:lnR w="9525" cap="flat">
+                      <a:solidFill>
+                        <a:srgbClr val="BFBFBF"/>
+                      </a:solidFill>
+                    </a:lnR>
+                    <a:lnT w="9525" cap="flat">
+                      <a:solidFill>
+                        <a:srgbClr val="BFBFBF"/>
+                      </a:solidFill>
+                    </a:lnT>
+                    <a:lnB w="9525" cap="flat">
+                      <a:solidFill>
+                        <a:srgbClr val="BFBFBF"/>
+                      </a:solidFill>
+                    </a:lnB>
                     <a:solidFill>
                       <a:srgbClr val="FFFFFF"/>
                     </a:solidFill>
@@ -5048,6 +5788,26 @@
                     </a:p>
                   </a:txBody>
                   <a:tcPr anchor="ctr" marL="36000" marR="36000" marT="0" marB="0">
+                    <a:lnL w="9525" cap="flat">
+                      <a:solidFill>
+                        <a:srgbClr val="BFBFBF"/>
+                      </a:solidFill>
+                    </a:lnL>
+                    <a:lnR w="9525" cap="flat">
+                      <a:solidFill>
+                        <a:srgbClr val="BFBFBF"/>
+                      </a:solidFill>
+                    </a:lnR>
+                    <a:lnT w="9525" cap="flat">
+                      <a:solidFill>
+                        <a:srgbClr val="BFBFBF"/>
+                      </a:solidFill>
+                    </a:lnT>
+                    <a:lnB w="9525" cap="flat">
+                      <a:solidFill>
+                        <a:srgbClr val="BFBFBF"/>
+                      </a:solidFill>
+                    </a:lnB>
                     <a:solidFill>
                       <a:srgbClr val="FFFFFF"/>
                     </a:solidFill>
@@ -5073,6 +5833,26 @@
                     </a:p>
                   </a:txBody>
                   <a:tcPr anchor="ctr" marL="36000" marR="36000" marT="0" marB="0">
+                    <a:lnL w="9525" cap="flat">
+                      <a:solidFill>
+                        <a:srgbClr val="BFBFBF"/>
+                      </a:solidFill>
+                    </a:lnL>
+                    <a:lnR w="9525" cap="flat">
+                      <a:solidFill>
+                        <a:srgbClr val="BFBFBF"/>
+                      </a:solidFill>
+                    </a:lnR>
+                    <a:lnT w="9525" cap="flat">
+                      <a:solidFill>
+                        <a:srgbClr val="BFBFBF"/>
+                      </a:solidFill>
+                    </a:lnT>
+                    <a:lnB w="9525" cap="flat">
+                      <a:solidFill>
+                        <a:srgbClr val="BFBFBF"/>
+                      </a:solidFill>
+                    </a:lnB>
                     <a:solidFill>
                       <a:srgbClr val="FFFFFF"/>
                     </a:solidFill>
@@ -5099,6 +5879,26 @@
                     </a:p>
                   </a:txBody>
                   <a:tcPr anchor="ctr" marL="36000" marR="36000" marT="0" marB="0">
+                    <a:lnL w="9525" cap="flat">
+                      <a:solidFill>
+                        <a:srgbClr val="BFBFBF"/>
+                      </a:solidFill>
+                    </a:lnL>
+                    <a:lnR w="9525" cap="flat">
+                      <a:solidFill>
+                        <a:srgbClr val="BFBFBF"/>
+                      </a:solidFill>
+                    </a:lnR>
+                    <a:lnT w="9525" cap="flat">
+                      <a:solidFill>
+                        <a:srgbClr val="BFBFBF"/>
+                      </a:solidFill>
+                    </a:lnT>
+                    <a:lnB w="9525" cap="flat">
+                      <a:solidFill>
+                        <a:srgbClr val="BFBFBF"/>
+                      </a:solidFill>
+                    </a:lnB>
                     <a:solidFill>
                       <a:srgbClr val="FFFFFF"/>
                     </a:solidFill>
@@ -5151,7 +5951,7 @@
           <a:p>
             <a:pPr algn="l"/>
             <a:r>
-              <a:rPr sz="2800" b="1">
+              <a:rPr sz="2000" b="1">
                 <a:solidFill>
                   <a:srgbClr val="222222"/>
                 </a:solidFill>
@@ -5162,7 +5962,7 @@
               <a:t>[도입배경③] </a:t>
             </a:r>
             <a:r>
-              <a:rPr sz="2800" b="1">
+              <a:rPr sz="2000" b="1">
                 <a:solidFill>
                   <a:srgbClr val="222222"/>
                 </a:solidFill>
@@ -5515,6 +6315,26 @@
                     </a:p>
                   </a:txBody>
                   <a:tcPr anchor="ctr" marL="36000" marR="36000" marT="0" marB="0">
+                    <a:lnL w="9525" cap="flat">
+                      <a:solidFill>
+                        <a:srgbClr val="BFBFBF"/>
+                      </a:solidFill>
+                    </a:lnL>
+                    <a:lnR w="9525" cap="flat">
+                      <a:solidFill>
+                        <a:srgbClr val="BFBFBF"/>
+                      </a:solidFill>
+                    </a:lnR>
+                    <a:lnT w="9525" cap="flat">
+                      <a:solidFill>
+                        <a:srgbClr val="BFBFBF"/>
+                      </a:solidFill>
+                    </a:lnT>
+                    <a:lnB w="9525" cap="flat">
+                      <a:solidFill>
+                        <a:srgbClr val="BFBFBF"/>
+                      </a:solidFill>
+                    </a:lnB>
                     <a:solidFill>
                       <a:srgbClr val="D8E0EC"/>
                     </a:solidFill>
@@ -5540,6 +6360,26 @@
                     </a:p>
                   </a:txBody>
                   <a:tcPr anchor="ctr" marL="36000" marR="36000" marT="0" marB="0">
+                    <a:lnL w="9525" cap="flat">
+                      <a:solidFill>
+                        <a:srgbClr val="BFBFBF"/>
+                      </a:solidFill>
+                    </a:lnL>
+                    <a:lnR w="9525" cap="flat">
+                      <a:solidFill>
+                        <a:srgbClr val="BFBFBF"/>
+                      </a:solidFill>
+                    </a:lnR>
+                    <a:lnT w="9525" cap="flat">
+                      <a:solidFill>
+                        <a:srgbClr val="BFBFBF"/>
+                      </a:solidFill>
+                    </a:lnT>
+                    <a:lnB w="9525" cap="flat">
+                      <a:solidFill>
+                        <a:srgbClr val="BFBFBF"/>
+                      </a:solidFill>
+                    </a:lnB>
                     <a:solidFill>
                       <a:srgbClr val="D8E0EC"/>
                     </a:solidFill>
@@ -5565,6 +6405,26 @@
                     </a:p>
                   </a:txBody>
                   <a:tcPr anchor="ctr" marL="36000" marR="36000" marT="0" marB="0">
+                    <a:lnL w="9525" cap="flat">
+                      <a:solidFill>
+                        <a:srgbClr val="BFBFBF"/>
+                      </a:solidFill>
+                    </a:lnL>
+                    <a:lnR w="9525" cap="flat">
+                      <a:solidFill>
+                        <a:srgbClr val="BFBFBF"/>
+                      </a:solidFill>
+                    </a:lnR>
+                    <a:lnT w="9525" cap="flat">
+                      <a:solidFill>
+                        <a:srgbClr val="BFBFBF"/>
+                      </a:solidFill>
+                    </a:lnT>
+                    <a:lnB w="9525" cap="flat">
+                      <a:solidFill>
+                        <a:srgbClr val="BFBFBF"/>
+                      </a:solidFill>
+                    </a:lnB>
                     <a:solidFill>
                       <a:srgbClr val="D8E0EC"/>
                     </a:solidFill>
@@ -5592,6 +6452,26 @@
                     </a:p>
                   </a:txBody>
                   <a:tcPr anchor="ctr" marL="36000" marR="36000" marT="0" marB="0">
+                    <a:lnL w="9525" cap="flat">
+                      <a:solidFill>
+                        <a:srgbClr val="BFBFBF"/>
+                      </a:solidFill>
+                    </a:lnL>
+                    <a:lnR w="9525" cap="flat">
+                      <a:solidFill>
+                        <a:srgbClr val="BFBFBF"/>
+                      </a:solidFill>
+                    </a:lnR>
+                    <a:lnT w="9525" cap="flat">
+                      <a:solidFill>
+                        <a:srgbClr val="BFBFBF"/>
+                      </a:solidFill>
+                    </a:lnT>
+                    <a:lnB w="9525" cap="flat">
+                      <a:solidFill>
+                        <a:srgbClr val="BFBFBF"/>
+                      </a:solidFill>
+                    </a:lnB>
                     <a:solidFill>
                       <a:srgbClr val="FFFFFF"/>
                     </a:solidFill>
@@ -5617,6 +6497,26 @@
                     </a:p>
                   </a:txBody>
                   <a:tcPr anchor="ctr" marL="36000" marR="36000" marT="0" marB="0">
+                    <a:lnL w="9525" cap="flat">
+                      <a:solidFill>
+                        <a:srgbClr val="BFBFBF"/>
+                      </a:solidFill>
+                    </a:lnL>
+                    <a:lnR w="9525" cap="flat">
+                      <a:solidFill>
+                        <a:srgbClr val="BFBFBF"/>
+                      </a:solidFill>
+                    </a:lnR>
+                    <a:lnT w="9525" cap="flat">
+                      <a:solidFill>
+                        <a:srgbClr val="BFBFBF"/>
+                      </a:solidFill>
+                    </a:lnT>
+                    <a:lnB w="9525" cap="flat">
+                      <a:solidFill>
+                        <a:srgbClr val="BFBFBF"/>
+                      </a:solidFill>
+                    </a:lnB>
                     <a:solidFill>
                       <a:srgbClr val="FFFFFF"/>
                     </a:solidFill>
@@ -5642,6 +6542,26 @@
                     </a:p>
                   </a:txBody>
                   <a:tcPr anchor="ctr" marL="36000" marR="36000" marT="0" marB="0">
+                    <a:lnL w="9525" cap="flat">
+                      <a:solidFill>
+                        <a:srgbClr val="BFBFBF"/>
+                      </a:solidFill>
+                    </a:lnL>
+                    <a:lnR w="9525" cap="flat">
+                      <a:solidFill>
+                        <a:srgbClr val="BFBFBF"/>
+                      </a:solidFill>
+                    </a:lnR>
+                    <a:lnT w="9525" cap="flat">
+                      <a:solidFill>
+                        <a:srgbClr val="BFBFBF"/>
+                      </a:solidFill>
+                    </a:lnT>
+                    <a:lnB w="9525" cap="flat">
+                      <a:solidFill>
+                        <a:srgbClr val="BFBFBF"/>
+                      </a:solidFill>
+                    </a:lnB>
                     <a:solidFill>
                       <a:srgbClr val="FFFFFF"/>
                     </a:solidFill>
@@ -5669,6 +6589,26 @@
                     </a:p>
                   </a:txBody>
                   <a:tcPr anchor="ctr" marL="36000" marR="36000" marT="0" marB="0">
+                    <a:lnL w="9525" cap="flat">
+                      <a:solidFill>
+                        <a:srgbClr val="BFBFBF"/>
+                      </a:solidFill>
+                    </a:lnL>
+                    <a:lnR w="9525" cap="flat">
+                      <a:solidFill>
+                        <a:srgbClr val="BFBFBF"/>
+                      </a:solidFill>
+                    </a:lnR>
+                    <a:lnT w="9525" cap="flat">
+                      <a:solidFill>
+                        <a:srgbClr val="BFBFBF"/>
+                      </a:solidFill>
+                    </a:lnT>
+                    <a:lnB w="9525" cap="flat">
+                      <a:solidFill>
+                        <a:srgbClr val="BFBFBF"/>
+                      </a:solidFill>
+                    </a:lnB>
                     <a:solidFill>
                       <a:srgbClr val="FFFFFF"/>
                     </a:solidFill>
@@ -5694,6 +6634,26 @@
                     </a:p>
                   </a:txBody>
                   <a:tcPr anchor="ctr" marL="36000" marR="36000" marT="0" marB="0">
+                    <a:lnL w="9525" cap="flat">
+                      <a:solidFill>
+                        <a:srgbClr val="BFBFBF"/>
+                      </a:solidFill>
+                    </a:lnL>
+                    <a:lnR w="9525" cap="flat">
+                      <a:solidFill>
+                        <a:srgbClr val="BFBFBF"/>
+                      </a:solidFill>
+                    </a:lnR>
+                    <a:lnT w="9525" cap="flat">
+                      <a:solidFill>
+                        <a:srgbClr val="BFBFBF"/>
+                      </a:solidFill>
+                    </a:lnT>
+                    <a:lnB w="9525" cap="flat">
+                      <a:solidFill>
+                        <a:srgbClr val="BFBFBF"/>
+                      </a:solidFill>
+                    </a:lnB>
                     <a:solidFill>
                       <a:srgbClr val="FFFFFF"/>
                     </a:solidFill>
@@ -5719,6 +6679,26 @@
                     </a:p>
                   </a:txBody>
                   <a:tcPr anchor="ctr" marL="36000" marR="36000" marT="0" marB="0">
+                    <a:lnL w="9525" cap="flat">
+                      <a:solidFill>
+                        <a:srgbClr val="BFBFBF"/>
+                      </a:solidFill>
+                    </a:lnL>
+                    <a:lnR w="9525" cap="flat">
+                      <a:solidFill>
+                        <a:srgbClr val="BFBFBF"/>
+                      </a:solidFill>
+                    </a:lnR>
+                    <a:lnT w="9525" cap="flat">
+                      <a:solidFill>
+                        <a:srgbClr val="BFBFBF"/>
+                      </a:solidFill>
+                    </a:lnT>
+                    <a:lnB w="9525" cap="flat">
+                      <a:solidFill>
+                        <a:srgbClr val="BFBFBF"/>
+                      </a:solidFill>
+                    </a:lnB>
                     <a:solidFill>
                       <a:srgbClr val="FFFFFF"/>
                     </a:solidFill>
@@ -5746,6 +6726,26 @@
                     </a:p>
                   </a:txBody>
                   <a:tcPr anchor="ctr" marL="36000" marR="36000" marT="0" marB="0">
+                    <a:lnL w="9525" cap="flat">
+                      <a:solidFill>
+                        <a:srgbClr val="BFBFBF"/>
+                      </a:solidFill>
+                    </a:lnL>
+                    <a:lnR w="9525" cap="flat">
+                      <a:solidFill>
+                        <a:srgbClr val="BFBFBF"/>
+                      </a:solidFill>
+                    </a:lnR>
+                    <a:lnT w="9525" cap="flat">
+                      <a:solidFill>
+                        <a:srgbClr val="BFBFBF"/>
+                      </a:solidFill>
+                    </a:lnT>
+                    <a:lnB w="9525" cap="flat">
+                      <a:solidFill>
+                        <a:srgbClr val="BFBFBF"/>
+                      </a:solidFill>
+                    </a:lnB>
                     <a:solidFill>
                       <a:srgbClr val="FFFFFF"/>
                     </a:solidFill>
@@ -5771,6 +6771,26 @@
                     </a:p>
                   </a:txBody>
                   <a:tcPr anchor="ctr" marL="36000" marR="36000" marT="0" marB="0">
+                    <a:lnL w="9525" cap="flat">
+                      <a:solidFill>
+                        <a:srgbClr val="BFBFBF"/>
+                      </a:solidFill>
+                    </a:lnL>
+                    <a:lnR w="9525" cap="flat">
+                      <a:solidFill>
+                        <a:srgbClr val="BFBFBF"/>
+                      </a:solidFill>
+                    </a:lnR>
+                    <a:lnT w="9525" cap="flat">
+                      <a:solidFill>
+                        <a:srgbClr val="BFBFBF"/>
+                      </a:solidFill>
+                    </a:lnT>
+                    <a:lnB w="9525" cap="flat">
+                      <a:solidFill>
+                        <a:srgbClr val="BFBFBF"/>
+                      </a:solidFill>
+                    </a:lnB>
                     <a:solidFill>
                       <a:srgbClr val="FFFFFF"/>
                     </a:solidFill>
@@ -5796,6 +6816,26 @@
                     </a:p>
                   </a:txBody>
                   <a:tcPr anchor="ctr" marL="36000" marR="36000" marT="0" marB="0">
+                    <a:lnL w="9525" cap="flat">
+                      <a:solidFill>
+                        <a:srgbClr val="BFBFBF"/>
+                      </a:solidFill>
+                    </a:lnL>
+                    <a:lnR w="9525" cap="flat">
+                      <a:solidFill>
+                        <a:srgbClr val="BFBFBF"/>
+                      </a:solidFill>
+                    </a:lnR>
+                    <a:lnT w="9525" cap="flat">
+                      <a:solidFill>
+                        <a:srgbClr val="BFBFBF"/>
+                      </a:solidFill>
+                    </a:lnT>
+                    <a:lnB w="9525" cap="flat">
+                      <a:solidFill>
+                        <a:srgbClr val="BFBFBF"/>
+                      </a:solidFill>
+                    </a:lnB>
                     <a:solidFill>
                       <a:srgbClr val="FFFFFF"/>
                     </a:solidFill>
@@ -5848,7 +6888,7 @@
           <a:p>
             <a:pPr algn="l"/>
             <a:r>
-              <a:rPr sz="2800" b="1">
+              <a:rPr sz="2000" b="1">
                 <a:solidFill>
                   <a:srgbClr val="222222"/>
                 </a:solidFill>
@@ -5859,7 +6899,7 @@
               <a:t>[규제·확대④] </a:t>
             </a:r>
             <a:r>
-              <a:rPr sz="2800" b="1">
+              <a:rPr sz="2000" b="1">
                 <a:solidFill>
                   <a:srgbClr val="222222"/>
                 </a:solidFill>
@@ -6174,6 +7214,26 @@
                     </a:p>
                   </a:txBody>
                   <a:tcPr anchor="ctr" marL="36000" marR="36000" marT="0" marB="0">
+                    <a:lnL w="9525" cap="flat">
+                      <a:solidFill>
+                        <a:srgbClr val="BFBFBF"/>
+                      </a:solidFill>
+                    </a:lnL>
+                    <a:lnR w="9525" cap="flat">
+                      <a:solidFill>
+                        <a:srgbClr val="BFBFBF"/>
+                      </a:solidFill>
+                    </a:lnR>
+                    <a:lnT w="9525" cap="flat">
+                      <a:solidFill>
+                        <a:srgbClr val="BFBFBF"/>
+                      </a:solidFill>
+                    </a:lnT>
+                    <a:lnB w="9525" cap="flat">
+                      <a:solidFill>
+                        <a:srgbClr val="BFBFBF"/>
+                      </a:solidFill>
+                    </a:lnB>
                     <a:solidFill>
                       <a:srgbClr val="EAEEF6"/>
                     </a:solidFill>
@@ -6199,6 +7259,26 @@
                     </a:p>
                   </a:txBody>
                   <a:tcPr anchor="ctr" marL="36000" marR="36000" marT="0" marB="0">
+                    <a:lnL w="9525" cap="flat">
+                      <a:solidFill>
+                        <a:srgbClr val="BFBFBF"/>
+                      </a:solidFill>
+                    </a:lnL>
+                    <a:lnR w="9525" cap="flat">
+                      <a:solidFill>
+                        <a:srgbClr val="BFBFBF"/>
+                      </a:solidFill>
+                    </a:lnR>
+                    <a:lnT w="9525" cap="flat">
+                      <a:solidFill>
+                        <a:srgbClr val="BFBFBF"/>
+                      </a:solidFill>
+                    </a:lnT>
+                    <a:lnB w="9525" cap="flat">
+                      <a:solidFill>
+                        <a:srgbClr val="BFBFBF"/>
+                      </a:solidFill>
+                    </a:lnB>
                     <a:solidFill>
                       <a:srgbClr val="EAEEF6"/>
                     </a:solidFill>
@@ -6226,6 +7306,26 @@
                     </a:p>
                   </a:txBody>
                   <a:tcPr anchor="ctr" marL="36000" marR="36000" marT="0" marB="0">
+                    <a:lnL w="9525" cap="flat">
+                      <a:solidFill>
+                        <a:srgbClr val="BFBFBF"/>
+                      </a:solidFill>
+                    </a:lnL>
+                    <a:lnR w="9525" cap="flat">
+                      <a:solidFill>
+                        <a:srgbClr val="BFBFBF"/>
+                      </a:solidFill>
+                    </a:lnR>
+                    <a:lnT w="9525" cap="flat">
+                      <a:solidFill>
+                        <a:srgbClr val="BFBFBF"/>
+                      </a:solidFill>
+                    </a:lnT>
+                    <a:lnB w="9525" cap="flat">
+                      <a:solidFill>
+                        <a:srgbClr val="BFBFBF"/>
+                      </a:solidFill>
+                    </a:lnB>
                     <a:solidFill>
                       <a:srgbClr val="FFFFFF"/>
                     </a:solidFill>
@@ -6251,6 +7351,26 @@
                     </a:p>
                   </a:txBody>
                   <a:tcPr anchor="ctr" marL="36000" marR="36000" marT="0" marB="0">
+                    <a:lnL w="9525" cap="flat">
+                      <a:solidFill>
+                        <a:srgbClr val="BFBFBF"/>
+                      </a:solidFill>
+                    </a:lnL>
+                    <a:lnR w="9525" cap="flat">
+                      <a:solidFill>
+                        <a:srgbClr val="BFBFBF"/>
+                      </a:solidFill>
+                    </a:lnR>
+                    <a:lnT w="9525" cap="flat">
+                      <a:solidFill>
+                        <a:srgbClr val="BFBFBF"/>
+                      </a:solidFill>
+                    </a:lnT>
+                    <a:lnB w="9525" cap="flat">
+                      <a:solidFill>
+                        <a:srgbClr val="BFBFBF"/>
+                      </a:solidFill>
+                    </a:lnB>
                     <a:solidFill>
                       <a:srgbClr val="FFFFFF"/>
                     </a:solidFill>
@@ -6278,6 +7398,26 @@
                     </a:p>
                   </a:txBody>
                   <a:tcPr anchor="ctr" marL="36000" marR="36000" marT="0" marB="0">
+                    <a:lnL w="9525" cap="flat">
+                      <a:solidFill>
+                        <a:srgbClr val="BFBFBF"/>
+                      </a:solidFill>
+                    </a:lnL>
+                    <a:lnR w="9525" cap="flat">
+                      <a:solidFill>
+                        <a:srgbClr val="BFBFBF"/>
+                      </a:solidFill>
+                    </a:lnR>
+                    <a:lnT w="9525" cap="flat">
+                      <a:solidFill>
+                        <a:srgbClr val="BFBFBF"/>
+                      </a:solidFill>
+                    </a:lnT>
+                    <a:lnB w="9525" cap="flat">
+                      <a:solidFill>
+                        <a:srgbClr val="BFBFBF"/>
+                      </a:solidFill>
+                    </a:lnB>
                     <a:solidFill>
                       <a:srgbClr val="FFFFFF"/>
                     </a:solidFill>
@@ -6303,6 +7443,26 @@
                     </a:p>
                   </a:txBody>
                   <a:tcPr anchor="ctr" marL="36000" marR="36000" marT="0" marB="0">
+                    <a:lnL w="9525" cap="flat">
+                      <a:solidFill>
+                        <a:srgbClr val="BFBFBF"/>
+                      </a:solidFill>
+                    </a:lnL>
+                    <a:lnR w="9525" cap="flat">
+                      <a:solidFill>
+                        <a:srgbClr val="BFBFBF"/>
+                      </a:solidFill>
+                    </a:lnR>
+                    <a:lnT w="9525" cap="flat">
+                      <a:solidFill>
+                        <a:srgbClr val="BFBFBF"/>
+                      </a:solidFill>
+                    </a:lnT>
+                    <a:lnB w="9525" cap="flat">
+                      <a:solidFill>
+                        <a:srgbClr val="BFBFBF"/>
+                      </a:solidFill>
+                    </a:lnB>
                     <a:solidFill>
                       <a:srgbClr val="FFFFFF"/>
                     </a:solidFill>
@@ -6330,6 +7490,26 @@
                     </a:p>
                   </a:txBody>
                   <a:tcPr anchor="ctr" marL="36000" marR="36000" marT="0" marB="0">
+                    <a:lnL w="9525" cap="flat">
+                      <a:solidFill>
+                        <a:srgbClr val="BFBFBF"/>
+                      </a:solidFill>
+                    </a:lnL>
+                    <a:lnR w="9525" cap="flat">
+                      <a:solidFill>
+                        <a:srgbClr val="BFBFBF"/>
+                      </a:solidFill>
+                    </a:lnR>
+                    <a:lnT w="9525" cap="flat">
+                      <a:solidFill>
+                        <a:srgbClr val="BFBFBF"/>
+                      </a:solidFill>
+                    </a:lnT>
+                    <a:lnB w="9525" cap="flat">
+                      <a:solidFill>
+                        <a:srgbClr val="BFBFBF"/>
+                      </a:solidFill>
+                    </a:lnB>
                     <a:solidFill>
                       <a:srgbClr val="FFFFFF"/>
                     </a:solidFill>
@@ -6355,6 +7535,26 @@
                     </a:p>
                   </a:txBody>
                   <a:tcPr anchor="ctr" marL="36000" marR="36000" marT="0" marB="0">
+                    <a:lnL w="9525" cap="flat">
+                      <a:solidFill>
+                        <a:srgbClr val="BFBFBF"/>
+                      </a:solidFill>
+                    </a:lnL>
+                    <a:lnR w="9525" cap="flat">
+                      <a:solidFill>
+                        <a:srgbClr val="BFBFBF"/>
+                      </a:solidFill>
+                    </a:lnR>
+                    <a:lnT w="9525" cap="flat">
+                      <a:solidFill>
+                        <a:srgbClr val="BFBFBF"/>
+                      </a:solidFill>
+                    </a:lnT>
+                    <a:lnB w="9525" cap="flat">
+                      <a:solidFill>
+                        <a:srgbClr val="BFBFBF"/>
+                      </a:solidFill>
+                    </a:lnB>
                     <a:solidFill>
                       <a:srgbClr val="FFFFFF"/>
                     </a:solidFill>
@@ -6382,6 +7582,26 @@
                     </a:p>
                   </a:txBody>
                   <a:tcPr anchor="ctr" marL="36000" marR="36000" marT="0" marB="0">
+                    <a:lnL w="9525" cap="flat">
+                      <a:solidFill>
+                        <a:srgbClr val="BFBFBF"/>
+                      </a:solidFill>
+                    </a:lnL>
+                    <a:lnR w="9525" cap="flat">
+                      <a:solidFill>
+                        <a:srgbClr val="BFBFBF"/>
+                      </a:solidFill>
+                    </a:lnR>
+                    <a:lnT w="9525" cap="flat">
+                      <a:solidFill>
+                        <a:srgbClr val="BFBFBF"/>
+                      </a:solidFill>
+                    </a:lnT>
+                    <a:lnB w="9525" cap="flat">
+                      <a:solidFill>
+                        <a:srgbClr val="BFBFBF"/>
+                      </a:solidFill>
+                    </a:lnB>
                     <a:solidFill>
                       <a:srgbClr val="FFFFFF"/>
                     </a:solidFill>
@@ -6407,6 +7627,26 @@
                     </a:p>
                   </a:txBody>
                   <a:tcPr anchor="ctr" marL="36000" marR="36000" marT="0" marB="0">
+                    <a:lnL w="9525" cap="flat">
+                      <a:solidFill>
+                        <a:srgbClr val="BFBFBF"/>
+                      </a:solidFill>
+                    </a:lnL>
+                    <a:lnR w="9525" cap="flat">
+                      <a:solidFill>
+                        <a:srgbClr val="BFBFBF"/>
+                      </a:solidFill>
+                    </a:lnR>
+                    <a:lnT w="9525" cap="flat">
+                      <a:solidFill>
+                        <a:srgbClr val="BFBFBF"/>
+                      </a:solidFill>
+                    </a:lnT>
+                    <a:lnB w="9525" cap="flat">
+                      <a:solidFill>
+                        <a:srgbClr val="BFBFBF"/>
+                      </a:solidFill>
+                    </a:lnB>
                     <a:solidFill>
                       <a:srgbClr val="FFFFFF"/>
                     </a:solidFill>

--- a/reports/ssg-delivery-report.pptx
+++ b/reports/ssg-delivery-report.pptx
@@ -3696,7 +3696,7 @@
                 <a:ea typeface="맑은 고딕"/>
                 <a:cs typeface="맑은 고딕"/>
               </a:rPr>
-              <a:t>□ '26. 7. 9.부터 이마트 양재점·하남점 인근 고객 대상 '2시간 내 배송' 시범 운영 개시</a:t>
+              <a:t>• '26. 7. 9.부터 이마트 양재점·하남점 인근 고객 대상 '2시간 내 배송' 시범 운영 개시</a:t>
             </a:r>
           </a:p>
         </p:txBody>
@@ -3709,8 +3709,8 @@
         </p:nvSpPr>
         <p:spPr>
           <a:xfrm>
-            <a:off x="658800" y="1821599"/>
-            <a:ext cx="8841600" cy="345600"/>
+            <a:off x="604800" y="1821599"/>
+            <a:ext cx="8895600" cy="345600"/>
           </a:xfrm>
           <a:prstGeom prst="rect">
             <a:avLst/>
@@ -3770,7 +3770,7 @@
                 <a:ea typeface="맑은 고딕"/>
                 <a:cs typeface="맑은 고딕"/>
               </a:rPr>
-              <a:t>□ 이륜차 퀵커머스(바로퀵)로 소화 불가한 3~4인 가구 대용량 장보기 수요를 사륜차로 흡수</a:t>
+              <a:t>• 이륜차 퀵커머스(바로퀵)로 소화 불가한 3~4인 가구 대용량 장보기 수요를 사륜차로 흡수</a:t>
             </a:r>
           </a:p>
         </p:txBody>
@@ -3807,7 +3807,7 @@
                 <a:ea typeface="맑은 고딕"/>
                 <a:cs typeface="맑은 고딕"/>
               </a:rPr>
-              <a:t>□ 새벽배송이 막힌 이마트 점포(PP센터)의 낮 시간대 가동률 제고 포석</a:t>
+              <a:t>• 새벽배송이 막힌 이마트 점포(PP센터)의 낮 시간대 가동률 제고 포석</a:t>
             </a:r>
           </a:p>
         </p:txBody>
@@ -4409,43 +4409,6 @@
         </p:nvSpPr>
         <p:spPr>
           <a:xfrm>
-            <a:off x="8316000" y="846000"/>
-            <a:ext cx="1188000" cy="216000"/>
-          </a:xfrm>
-          <a:prstGeom prst="rect">
-            <a:avLst/>
-          </a:prstGeom>
-          <a:noFill/>
-        </p:spPr>
-        <p:txBody>
-          <a:bodyPr wrap="square" anchor="t" lIns="0" rIns="0" tIns="0" bIns="0">
-            <a:spAutoFit/>
-          </a:bodyPr>
-          <a:lstStyle/>
-          <a:p>
-            <a:pPr algn="r"/>
-            <a:r>
-              <a:rPr sz="1000" b="1">
-                <a:solidFill>
-                  <a:srgbClr val="000000"/>
-                </a:solidFill>
-                <a:latin typeface="맑은 고딕"/>
-                <a:ea typeface="맑은 고딕"/>
-                <a:cs typeface="맑은 고딕"/>
-              </a:rPr>
-              <a:t>(기준 : '26. 7월)</a:t>
-            </a:r>
-          </a:p>
-        </p:txBody>
-      </p:sp>
-      <p:sp>
-        <p:nvSpPr>
-          <p:cNvPr id="5" name="TextBox 4"/>
-          <p:cNvSpPr txBox="1"/>
-          <p:nvPr/>
-        </p:nvSpPr>
-        <p:spPr>
-          <a:xfrm>
             <a:off x="374400" y="6443999"/>
             <a:ext cx="6480000" cy="198000"/>
           </a:xfrm>
@@ -4477,7 +4440,7 @@
       </p:sp>
       <p:sp>
         <p:nvSpPr>
-          <p:cNvPr id="6" name="TextBox 5"/>
+          <p:cNvPr id="5" name="TextBox 4"/>
           <p:cNvSpPr txBox="1"/>
           <p:nvPr/>
         </p:nvSpPr>
@@ -4514,7 +4477,7 @@
       </p:sp>
       <p:graphicFrame>
         <p:nvGraphicFramePr>
-          <p:cNvPr id="7" name="Table 6"/>
+          <p:cNvPr id="6" name="Table 5"/>
           <p:cNvGraphicFramePr>
             <a:graphicFrameLocks noGrp="1"/>
           </p:cNvGraphicFramePr>
@@ -6155,7 +6118,7 @@
                 <a:ea typeface="맑은 고딕"/>
                 <a:cs typeface="맑은 고딕"/>
               </a:rPr>
-              <a:t>□ 이륜차 퀵커머스는 적재량 제약으로 소량 배송에 한정 → 대형마트 주력인 3~4인 가족 대용량 장보기 공백</a:t>
+              <a:t>• 이륜차 퀵커머스는 적재량 제약으로 소량 배송에 한정 → 대형마트 주력인 3~4인 가족 대용량 장보기 공백</a:t>
             </a:r>
           </a:p>
         </p:txBody>
@@ -6192,7 +6155,7 @@
                 <a:ea typeface="맑은 고딕"/>
                 <a:cs typeface="맑은 고딕"/>
               </a:rPr>
-              <a:t>□ 바로퀵 6월 매출 '26. 1월 대비 197% 증가 → 온디맨드 장보기 수요 실증 후 서비스 확대</a:t>
+              <a:t>• 바로퀵 6월 매출 '26. 1월 대비 197% 증가 → 온디맨드 장보기 수요 실증 후 서비스 확대</a:t>
             </a:r>
           </a:p>
         </p:txBody>
@@ -6229,7 +6192,7 @@
                 <a:ea typeface="맑은 고딕"/>
                 <a:cs typeface="맑은 고딕"/>
               </a:rPr>
-              <a:t>□ 1시간(소량·이륜차) / 2시간(대용량·사륜차) 이원화로 퀵커머스 수요 세분화 대응</a:t>
+              <a:t>• 1시간(소량·이륜차) / 2시간(대용량·사륜차) 이원화로 퀵커머스 수요 세분화 대응</a:t>
             </a:r>
           </a:p>
         </p:txBody>
@@ -6266,7 +6229,7 @@
                 <a:ea typeface="맑은 고딕"/>
                 <a:cs typeface="맑은 고딕"/>
               </a:rPr>
-              <a:t>□ 퀵커머스 1위 B마트도 대용량 휴지·계란 30구 등 품목 다변화 및 일부 사륜차 배송 병행</a:t>
+              <a:t>• 퀵커머스 1위 B마트도 대용량 휴지·계란 30구 등 품목 다변화 및 일부 사륜차 배송 병행</a:t>
             </a:r>
           </a:p>
         </p:txBody>
@@ -7055,7 +7018,7 @@
                 <a:ea typeface="맑은 고딕"/>
                 <a:cs typeface="맑은 고딕"/>
               </a:rPr>
-              <a:t>□ 전국 160여 이마트 점포(PP센터)는 유통산업발전법상 새벽 시간대 가동 불가</a:t>
+              <a:t>• 전국 160여 이마트 점포(PP센터)는 유통산업발전법상 새벽 시간대 가동 불가</a:t>
             </a:r>
           </a:p>
         </p:txBody>
@@ -7068,8 +7031,8 @@
         </p:nvSpPr>
         <p:spPr>
           <a:xfrm>
-            <a:off x="658800" y="1821599"/>
-            <a:ext cx="8841600" cy="345600"/>
+            <a:off x="604800" y="1821599"/>
+            <a:ext cx="8895600" cy="345600"/>
           </a:xfrm>
           <a:prstGeom prst="rect">
             <a:avLst/>
@@ -7129,7 +7092,7 @@
                 <a:ea typeface="맑은 고딕"/>
                 <a:cs typeface="맑은 고딕"/>
               </a:rPr>
-              <a:t>□ 정치권 규제 완화 논의 진행 중 → 개정 시 주간 운영 노하우의 새벽배송 확장 가능</a:t>
+              <a:t>• 정치권 규제 완화 논의 진행 중 → 개정 시 주간 운영 노하우의 새벽배송 확장 가능</a:t>
             </a:r>
           </a:p>
         </p:txBody>
@@ -7166,7 +7129,7 @@
                 <a:ea typeface="맑은 고딕"/>
                 <a:cs typeface="맑은 고딕"/>
               </a:rPr>
-              <a:t>□ 이커머스 3위 SSG닷컴의 배송 전략 기반 반등 여부 주목</a:t>
+              <a:t>• 이커머스 3위 SSG닷컴의 배송 전략 기반 반등 여부 주목</a:t>
             </a:r>
           </a:p>
         </p:txBody>

--- a/reports/ssg-delivery-report.pptx
+++ b/reports/ssg-delivery-report.pptx
@@ -3688,7 +3688,7 @@
           <a:p>
             <a:pPr algn="l"/>
             <a:r>
-              <a:rPr sz="1300" b="1">
+              <a:rPr sz="1200" b="1">
                 <a:solidFill>
                   <a:srgbClr val="000000"/>
                 </a:solidFill>
@@ -3725,7 +3725,7 @@
           <a:p>
             <a:pPr algn="l"/>
             <a:r>
-              <a:rPr sz="1200" b="0">
+              <a:rPr sz="1100" b="0">
                 <a:solidFill>
                   <a:srgbClr val="000000"/>
                 </a:solidFill>
@@ -3762,7 +3762,7 @@
           <a:p>
             <a:pPr algn="l"/>
             <a:r>
-              <a:rPr sz="1300" b="1">
+              <a:rPr sz="1200" b="1">
                 <a:solidFill>
                   <a:srgbClr val="000000"/>
                 </a:solidFill>
@@ -3799,7 +3799,7 @@
           <a:p>
             <a:pPr algn="l"/>
             <a:r>
-              <a:rPr sz="1300" b="1">
+              <a:rPr sz="1200" b="1">
                 <a:solidFill>
                   <a:srgbClr val="000000"/>
                 </a:solidFill>
@@ -3842,7 +3842,7 @@
                     <a:p>
                       <a:pPr algn="ctr"/>
                       <a:r>
-                        <a:rPr sz="1200" b="1">
+                        <a:rPr sz="1000" b="1">
                           <a:solidFill>
                             <a:srgbClr val="000066"/>
                           </a:solidFill>
@@ -3887,7 +3887,7 @@
                     <a:p>
                       <a:pPr algn="ctr"/>
                       <a:r>
-                        <a:rPr sz="1200" b="1">
+                        <a:rPr sz="1000" b="1">
                           <a:solidFill>
                             <a:srgbClr val="000066"/>
                           </a:solidFill>
@@ -3934,7 +3934,7 @@
                     <a:p>
                       <a:pPr algn="l"/>
                       <a:r>
-                        <a:rPr sz="1200" b="1">
+                        <a:rPr sz="1000" b="1">
                           <a:solidFill>
                             <a:srgbClr val="000000"/>
                           </a:solidFill>
@@ -3979,7 +3979,7 @@
                     <a:p>
                       <a:pPr algn="l"/>
                       <a:r>
-                        <a:rPr sz="1200" b="0">
+                        <a:rPr sz="1000" b="0">
                           <a:solidFill>
                             <a:srgbClr val="000000"/>
                           </a:solidFill>
@@ -4026,7 +4026,7 @@
                     <a:p>
                       <a:pPr algn="l"/>
                       <a:r>
-                        <a:rPr sz="1200" b="1">
+                        <a:rPr sz="1000" b="1">
                           <a:solidFill>
                             <a:srgbClr val="000000"/>
                           </a:solidFill>
@@ -4071,7 +4071,7 @@
                     <a:p>
                       <a:pPr algn="l"/>
                       <a:r>
-                        <a:rPr sz="1200" b="0">
+                        <a:rPr sz="1000" b="0">
                           <a:solidFill>
                             <a:srgbClr val="000000"/>
                           </a:solidFill>
@@ -4118,7 +4118,7 @@
                     <a:p>
                       <a:pPr algn="l"/>
                       <a:r>
-                        <a:rPr sz="1200" b="1">
+                        <a:rPr sz="1000" b="1">
                           <a:solidFill>
                             <a:srgbClr val="000000"/>
                           </a:solidFill>
@@ -4163,7 +4163,7 @@
                     <a:p>
                       <a:pPr algn="l"/>
                       <a:r>
-                        <a:rPr sz="1200" b="0">
+                        <a:rPr sz="1000" b="0">
                           <a:solidFill>
                             <a:srgbClr val="000000"/>
                           </a:solidFill>
@@ -4210,7 +4210,7 @@
                     <a:p>
                       <a:pPr algn="l"/>
                       <a:r>
-                        <a:rPr sz="1200" b="1">
+                        <a:rPr sz="1000" b="1">
                           <a:solidFill>
                             <a:srgbClr val="000000"/>
                           </a:solidFill>
@@ -4255,7 +4255,7 @@
                     <a:p>
                       <a:pPr algn="l"/>
                       <a:r>
-                        <a:rPr sz="1200" b="0">
+                        <a:rPr sz="1000" b="0">
                           <a:solidFill>
                             <a:srgbClr val="000000"/>
                           </a:solidFill>
@@ -4508,7 +4508,7 @@
                     <a:p>
                       <a:pPr algn="ctr"/>
                       <a:r>
-                        <a:rPr sz="1100" b="1">
+                        <a:rPr sz="1000" b="1">
                           <a:solidFill>
                             <a:srgbClr val="000066"/>
                           </a:solidFill>
@@ -4553,7 +4553,7 @@
                     <a:p>
                       <a:pPr algn="ctr"/>
                       <a:r>
-                        <a:rPr sz="1100" b="1">
+                        <a:rPr sz="1000" b="1">
                           <a:solidFill>
                             <a:srgbClr val="000066"/>
                           </a:solidFill>
@@ -4598,7 +4598,7 @@
                     <a:p>
                       <a:pPr algn="ctr"/>
                       <a:r>
-                        <a:rPr sz="1100" b="1">
+                        <a:rPr sz="1000" b="1">
                           <a:solidFill>
                             <a:srgbClr val="000066"/>
                           </a:solidFill>
@@ -4643,7 +4643,7 @@
                     <a:p>
                       <a:pPr algn="ctr"/>
                       <a:r>
-                        <a:rPr sz="1100" b="1">
+                        <a:rPr sz="1000" b="1">
                           <a:solidFill>
                             <a:srgbClr val="000066"/>
                           </a:solidFill>
@@ -4688,7 +4688,7 @@
                     <a:p>
                       <a:pPr algn="ctr"/>
                       <a:r>
-                        <a:rPr sz="1100" b="1">
+                        <a:rPr sz="1000" b="1">
                           <a:solidFill>
                             <a:srgbClr val="000066"/>
                           </a:solidFill>
@@ -4735,7 +4735,7 @@
                     <a:p>
                       <a:pPr algn="l"/>
                       <a:r>
-                        <a:rPr sz="1100" b="1">
+                        <a:rPr sz="1000" b="1">
                           <a:solidFill>
                             <a:srgbClr val="000000"/>
                           </a:solidFill>
@@ -4780,7 +4780,7 @@
                     <a:p>
                       <a:pPr algn="l"/>
                       <a:r>
-                        <a:rPr sz="1100" b="0">
+                        <a:rPr sz="1000" b="0">
                           <a:solidFill>
                             <a:srgbClr val="000000"/>
                           </a:solidFill>
@@ -4826,7 +4826,7 @@
                     <a:p>
                       <a:pPr algn="r"/>
                       <a:r>
-                        <a:rPr sz="1100" b="0">
+                        <a:rPr sz="1000" b="0">
                           <a:solidFill>
                             <a:srgbClr val="000000"/>
                           </a:solidFill>
@@ -4871,7 +4871,7 @@
                     <a:p>
                       <a:pPr algn="l"/>
                       <a:r>
-                        <a:rPr sz="1100" b="0">
+                        <a:rPr sz="1000" b="0">
                           <a:solidFill>
                             <a:srgbClr val="000000"/>
                           </a:solidFill>
@@ -4916,7 +4916,7 @@
                     <a:p>
                       <a:pPr algn="l"/>
                       <a:r>
-                        <a:rPr sz="1100" b="0">
+                        <a:rPr sz="1000" b="0">
                           <a:solidFill>
                             <a:srgbClr val="000000"/>
                           </a:solidFill>
@@ -4963,7 +4963,7 @@
                     <a:p>
                       <a:pPr algn="l"/>
                       <a:r>
-                        <a:rPr sz="1100" b="1">
+                        <a:rPr sz="1000" b="1">
                           <a:solidFill>
                             <a:srgbClr val="000000"/>
                           </a:solidFill>
@@ -5008,7 +5008,7 @@
                     <a:p>
                       <a:pPr algn="l"/>
                       <a:r>
-                        <a:rPr sz="1100" b="0">
+                        <a:rPr sz="1000" b="0">
                           <a:solidFill>
                             <a:srgbClr val="000000"/>
                           </a:solidFill>
@@ -5053,7 +5053,7 @@
                     <a:p>
                       <a:pPr algn="r"/>
                       <a:r>
-                        <a:rPr sz="1100" b="0">
+                        <a:rPr sz="1000" b="0">
                           <a:solidFill>
                             <a:srgbClr val="000000"/>
                           </a:solidFill>
@@ -5098,7 +5098,7 @@
                     <a:p>
                       <a:pPr algn="l"/>
                       <a:r>
-                        <a:rPr sz="1100" b="0">
+                        <a:rPr sz="1000" b="0">
                           <a:solidFill>
                             <a:srgbClr val="000000"/>
                           </a:solidFill>
@@ -5143,7 +5143,7 @@
                     <a:p>
                       <a:pPr algn="l"/>
                       <a:r>
-                        <a:rPr sz="1100" b="0">
+                        <a:rPr sz="1000" b="0">
                           <a:solidFill>
                             <a:srgbClr val="000000"/>
                           </a:solidFill>
@@ -5191,7 +5191,7 @@
                     <a:p>
                       <a:pPr algn="l"/>
                       <a:r>
-                        <a:rPr sz="1100" b="1">
+                        <a:rPr sz="1000" b="1">
                           <a:solidFill>
                             <a:srgbClr val="000000"/>
                           </a:solidFill>
@@ -5236,7 +5236,7 @@
                     <a:p>
                       <a:pPr algn="l"/>
                       <a:r>
-                        <a:rPr sz="1100" b="0">
+                        <a:rPr sz="1000" b="0">
                           <a:solidFill>
                             <a:srgbClr val="000000"/>
                           </a:solidFill>
@@ -5281,7 +5281,7 @@
                     <a:p>
                       <a:pPr algn="r"/>
                       <a:r>
-                        <a:rPr sz="1100" b="0">
+                        <a:rPr sz="1000" b="0">
                           <a:solidFill>
                             <a:srgbClr val="000000"/>
                           </a:solidFill>
@@ -5326,7 +5326,7 @@
                     <a:p>
                       <a:pPr algn="l"/>
                       <a:r>
-                        <a:rPr sz="1100" b="0">
+                        <a:rPr sz="1000" b="0">
                           <a:solidFill>
                             <a:srgbClr val="000000"/>
                           </a:solidFill>
@@ -5371,7 +5371,7 @@
                     <a:p>
                       <a:pPr algn="l"/>
                       <a:r>
-                        <a:rPr sz="1100" b="0">
+                        <a:rPr sz="1000" b="0">
                           <a:solidFill>
                             <a:srgbClr val="000000"/>
                           </a:solidFill>
@@ -5418,7 +5418,7 @@
                     <a:p>
                       <a:pPr algn="l"/>
                       <a:r>
-                        <a:rPr sz="1100" b="1">
+                        <a:rPr sz="1000" b="1">
                           <a:solidFill>
                             <a:srgbClr val="000000"/>
                           </a:solidFill>
@@ -5463,7 +5463,7 @@
                     <a:p>
                       <a:pPr algn="l"/>
                       <a:r>
-                        <a:rPr sz="1100" b="0">
+                        <a:rPr sz="1000" b="0">
                           <a:solidFill>
                             <a:srgbClr val="000000"/>
                           </a:solidFill>
@@ -5509,7 +5509,7 @@
                     <a:p>
                       <a:pPr algn="r"/>
                       <a:r>
-                        <a:rPr sz="1100" b="0">
+                        <a:rPr sz="1000" b="0">
                           <a:solidFill>
                             <a:srgbClr val="000000"/>
                           </a:solidFill>
@@ -5554,7 +5554,7 @@
                     <a:p>
                       <a:pPr algn="l"/>
                       <a:r>
-                        <a:rPr sz="1100" b="0">
+                        <a:rPr sz="1000" b="0">
                           <a:solidFill>
                             <a:srgbClr val="000000"/>
                           </a:solidFill>
@@ -5599,7 +5599,7 @@
                     <a:p>
                       <a:pPr algn="l"/>
                       <a:r>
-                        <a:rPr sz="1100" b="0">
+                        <a:rPr sz="1000" b="0">
                           <a:solidFill>
                             <a:srgbClr val="000000"/>
                           </a:solidFill>
@@ -5647,7 +5647,7 @@
                     <a:p>
                       <a:pPr algn="l"/>
                       <a:r>
-                        <a:rPr sz="1100" b="1">
+                        <a:rPr sz="1000" b="1">
                           <a:solidFill>
                             <a:srgbClr val="000000"/>
                           </a:solidFill>
@@ -5692,7 +5692,7 @@
                     <a:p>
                       <a:pPr algn="l"/>
                       <a:r>
-                        <a:rPr sz="1100" b="0">
+                        <a:rPr sz="1000" b="0">
                           <a:solidFill>
                             <a:srgbClr val="000000"/>
                           </a:solidFill>
@@ -5738,7 +5738,7 @@
                     <a:p>
                       <a:pPr algn="r"/>
                       <a:r>
-                        <a:rPr sz="1100" b="0">
+                        <a:rPr sz="1000" b="0">
                           <a:solidFill>
                             <a:srgbClr val="000000"/>
                           </a:solidFill>
@@ -5783,7 +5783,7 @@
                     <a:p>
                       <a:pPr algn="l"/>
                       <a:r>
-                        <a:rPr sz="1100" b="0">
+                        <a:rPr sz="1000" b="0">
                           <a:solidFill>
                             <a:srgbClr val="000000"/>
                           </a:solidFill>
@@ -5828,7 +5828,7 @@
                     <a:p>
                       <a:pPr algn="l"/>
                       <a:r>
-                        <a:rPr sz="1100" b="0">
+                        <a:rPr sz="1000" b="0">
                           <a:solidFill>
                             <a:srgbClr val="000000"/>
                           </a:solidFill>
@@ -6110,7 +6110,7 @@
           <a:p>
             <a:pPr algn="l"/>
             <a:r>
-              <a:rPr sz="1300" b="1">
+              <a:rPr sz="1200" b="1">
                 <a:solidFill>
                   <a:srgbClr val="000000"/>
                 </a:solidFill>
@@ -6147,7 +6147,7 @@
           <a:p>
             <a:pPr algn="l"/>
             <a:r>
-              <a:rPr sz="1300" b="1">
+              <a:rPr sz="1200" b="1">
                 <a:solidFill>
                   <a:srgbClr val="000000"/>
                 </a:solidFill>
@@ -6184,7 +6184,7 @@
           <a:p>
             <a:pPr algn="l"/>
             <a:r>
-              <a:rPr sz="1300" b="1">
+              <a:rPr sz="1200" b="1">
                 <a:solidFill>
                   <a:srgbClr val="000000"/>
                 </a:solidFill>
@@ -6221,7 +6221,7 @@
           <a:p>
             <a:pPr algn="l"/>
             <a:r>
-              <a:rPr sz="1300" b="1">
+              <a:rPr sz="1200" b="1">
                 <a:solidFill>
                   <a:srgbClr val="000000"/>
                 </a:solidFill>
@@ -6265,7 +6265,7 @@
                     <a:p>
                       <a:pPr algn="ctr"/>
                       <a:r>
-                        <a:rPr sz="1200" b="1">
+                        <a:rPr sz="1000" b="1">
                           <a:solidFill>
                             <a:srgbClr val="000066"/>
                           </a:solidFill>
@@ -6310,7 +6310,7 @@
                     <a:p>
                       <a:pPr algn="ctr"/>
                       <a:r>
-                        <a:rPr sz="1200" b="1">
+                        <a:rPr sz="1000" b="1">
                           <a:solidFill>
                             <a:srgbClr val="000066"/>
                           </a:solidFill>
@@ -6355,7 +6355,7 @@
                     <a:p>
                       <a:pPr algn="ctr"/>
                       <a:r>
-                        <a:rPr sz="1200" b="1">
+                        <a:rPr sz="1000" b="1">
                           <a:solidFill>
                             <a:srgbClr val="000066"/>
                           </a:solidFill>
@@ -6402,7 +6402,7 @@
                     <a:p>
                       <a:pPr algn="l"/>
                       <a:r>
-                        <a:rPr sz="1200" b="1">
+                        <a:rPr sz="1000" b="1">
                           <a:solidFill>
                             <a:srgbClr val="000000"/>
                           </a:solidFill>
@@ -6447,7 +6447,7 @@
                     <a:p>
                       <a:pPr algn="r"/>
                       <a:r>
-                        <a:rPr sz="1200" b="0">
+                        <a:rPr sz="1000" b="0">
                           <a:solidFill>
                             <a:srgbClr val="000000"/>
                           </a:solidFill>
@@ -6492,7 +6492,7 @@
                     <a:p>
                       <a:pPr algn="r"/>
                       <a:r>
-                        <a:rPr sz="1200" b="0">
+                        <a:rPr sz="1000" b="0">
                           <a:solidFill>
                             <a:srgbClr val="000000"/>
                           </a:solidFill>
@@ -6539,7 +6539,7 @@
                     <a:p>
                       <a:pPr algn="l"/>
                       <a:r>
-                        <a:rPr sz="1200" b="1">
+                        <a:rPr sz="1000" b="1">
                           <a:solidFill>
                             <a:srgbClr val="000000"/>
                           </a:solidFill>
@@ -6584,7 +6584,7 @@
                     <a:p>
                       <a:pPr algn="r"/>
                       <a:r>
-                        <a:rPr sz="1200" b="0">
+                        <a:rPr sz="1000" b="0">
                           <a:solidFill>
                             <a:srgbClr val="000000"/>
                           </a:solidFill>
@@ -6629,7 +6629,7 @@
                     <a:p>
                       <a:pPr algn="r"/>
                       <a:r>
-                        <a:rPr sz="1200" b="0">
+                        <a:rPr sz="1000" b="0">
                           <a:solidFill>
                             <a:srgbClr val="000000"/>
                           </a:solidFill>
@@ -6676,7 +6676,7 @@
                     <a:p>
                       <a:pPr algn="l"/>
                       <a:r>
-                        <a:rPr sz="1200" b="1">
+                        <a:rPr sz="1000" b="1">
                           <a:solidFill>
                             <a:srgbClr val="000000"/>
                           </a:solidFill>
@@ -6721,7 +6721,7 @@
                     <a:p>
                       <a:pPr algn="r"/>
                       <a:r>
-                        <a:rPr sz="1200" b="0">
+                        <a:rPr sz="1000" b="0">
                           <a:solidFill>
                             <a:srgbClr val="000000"/>
                           </a:solidFill>
@@ -6766,7 +6766,7 @@
                     <a:p>
                       <a:pPr algn="r"/>
                       <a:r>
-                        <a:rPr sz="1200" b="0">
+                        <a:rPr sz="1000" b="0">
                           <a:solidFill>
                             <a:srgbClr val="000000"/>
                           </a:solidFill>
@@ -7010,7 +7010,7 @@
           <a:p>
             <a:pPr algn="l"/>
             <a:r>
-              <a:rPr sz="1300" b="1">
+              <a:rPr sz="1200" b="1">
                 <a:solidFill>
                   <a:srgbClr val="000000"/>
                 </a:solidFill>
@@ -7047,7 +7047,7 @@
           <a:p>
             <a:pPr algn="l"/>
             <a:r>
-              <a:rPr sz="1200" b="0">
+              <a:rPr sz="1100" b="0">
                 <a:solidFill>
                   <a:srgbClr val="000000"/>
                 </a:solidFill>
@@ -7084,7 +7084,7 @@
           <a:p>
             <a:pPr algn="l"/>
             <a:r>
-              <a:rPr sz="1300" b="1">
+              <a:rPr sz="1200" b="1">
                 <a:solidFill>
                   <a:srgbClr val="000000"/>
                 </a:solidFill>
@@ -7121,7 +7121,7 @@
           <a:p>
             <a:pPr algn="l"/>
             <a:r>
-              <a:rPr sz="1300" b="1">
+              <a:rPr sz="1200" b="1">
                 <a:solidFill>
                   <a:srgbClr val="000000"/>
                 </a:solidFill>
@@ -7164,7 +7164,7 @@
                     <a:p>
                       <a:pPr algn="ctr"/>
                       <a:r>
-                        <a:rPr sz="1200" b="1">
+                        <a:rPr sz="1000" b="1">
                           <a:solidFill>
                             <a:srgbClr val="000066"/>
                           </a:solidFill>
@@ -7209,7 +7209,7 @@
                     <a:p>
                       <a:pPr algn="ctr"/>
                       <a:r>
-                        <a:rPr sz="1200" b="1">
+                        <a:rPr sz="1000" b="1">
                           <a:solidFill>
                             <a:srgbClr val="000066"/>
                           </a:solidFill>
@@ -7256,7 +7256,7 @@
                     <a:p>
                       <a:pPr algn="l"/>
                       <a:r>
-                        <a:rPr sz="1200" b="1">
+                        <a:rPr sz="1000" b="1">
                           <a:solidFill>
                             <a:srgbClr val="000000"/>
                           </a:solidFill>
@@ -7301,7 +7301,7 @@
                     <a:p>
                       <a:pPr algn="l"/>
                       <a:r>
-                        <a:rPr sz="1200" b="0">
+                        <a:rPr sz="1000" b="0">
                           <a:solidFill>
                             <a:srgbClr val="000000"/>
                           </a:solidFill>
@@ -7348,7 +7348,7 @@
                     <a:p>
                       <a:pPr algn="l"/>
                       <a:r>
-                        <a:rPr sz="1200" b="1">
+                        <a:rPr sz="1000" b="1">
                           <a:solidFill>
                             <a:srgbClr val="000000"/>
                           </a:solidFill>
@@ -7393,7 +7393,7 @@
                     <a:p>
                       <a:pPr algn="l"/>
                       <a:r>
-                        <a:rPr sz="1200" b="0">
+                        <a:rPr sz="1000" b="0">
                           <a:solidFill>
                             <a:srgbClr val="000000"/>
                           </a:solidFill>
@@ -7440,7 +7440,7 @@
                     <a:p>
                       <a:pPr algn="l"/>
                       <a:r>
-                        <a:rPr sz="1200" b="1">
+                        <a:rPr sz="1000" b="1">
                           <a:solidFill>
                             <a:srgbClr val="000000"/>
                           </a:solidFill>
@@ -7485,7 +7485,7 @@
                     <a:p>
                       <a:pPr algn="l"/>
                       <a:r>
-                        <a:rPr sz="1200" b="0">
+                        <a:rPr sz="1000" b="0">
                           <a:solidFill>
                             <a:srgbClr val="000000"/>
                           </a:solidFill>
@@ -7532,7 +7532,7 @@
                     <a:p>
                       <a:pPr algn="l"/>
                       <a:r>
-                        <a:rPr sz="1200" b="1">
+                        <a:rPr sz="1000" b="1">
                           <a:solidFill>
                             <a:srgbClr val="000000"/>
                           </a:solidFill>
@@ -7577,7 +7577,7 @@
                     <a:p>
                       <a:pPr algn="l"/>
                       <a:r>
-                        <a:rPr sz="1200" b="0">
+                        <a:rPr sz="1000" b="0">
                           <a:solidFill>
                             <a:srgbClr val="000000"/>
                           </a:solidFill>

--- a/reports/ssg-delivery-report.pptx
+++ b/reports/ssg-delivery-report.pptx
@@ -3932,7 +3932,7 @@
                     <a:bodyPr wrap="square"/>
                     <a:lstStyle/>
                     <a:p>
-                      <a:pPr algn="l"/>
+                      <a:pPr algn="ctr"/>
                       <a:r>
                         <a:rPr sz="1000" b="1">
                           <a:solidFill>
@@ -3977,7 +3977,7 @@
                     <a:bodyPr wrap="square"/>
                     <a:lstStyle/>
                     <a:p>
-                      <a:pPr algn="l"/>
+                      <a:pPr algn="ctr"/>
                       <a:r>
                         <a:rPr sz="1000" b="0">
                           <a:solidFill>
@@ -4024,7 +4024,7 @@
                     <a:bodyPr wrap="square"/>
                     <a:lstStyle/>
                     <a:p>
-                      <a:pPr algn="l"/>
+                      <a:pPr algn="ctr"/>
                       <a:r>
                         <a:rPr sz="1000" b="1">
                           <a:solidFill>
@@ -4069,7 +4069,7 @@
                     <a:bodyPr wrap="square"/>
                     <a:lstStyle/>
                     <a:p>
-                      <a:pPr algn="l"/>
+                      <a:pPr algn="ctr"/>
                       <a:r>
                         <a:rPr sz="1000" b="0">
                           <a:solidFill>
@@ -4116,7 +4116,7 @@
                     <a:bodyPr wrap="square"/>
                     <a:lstStyle/>
                     <a:p>
-                      <a:pPr algn="l"/>
+                      <a:pPr algn="ctr"/>
                       <a:r>
                         <a:rPr sz="1000" b="1">
                           <a:solidFill>
@@ -4161,7 +4161,7 @@
                     <a:bodyPr wrap="square"/>
                     <a:lstStyle/>
                     <a:p>
-                      <a:pPr algn="l"/>
+                      <a:pPr algn="ctr"/>
                       <a:r>
                         <a:rPr sz="1000" b="0">
                           <a:solidFill>
@@ -4208,7 +4208,7 @@
                     <a:bodyPr wrap="square"/>
                     <a:lstStyle/>
                     <a:p>
-                      <a:pPr algn="l"/>
+                      <a:pPr algn="ctr"/>
                       <a:r>
                         <a:rPr sz="1000" b="1">
                           <a:solidFill>
@@ -4253,7 +4253,7 @@
                     <a:bodyPr wrap="square"/>
                     <a:lstStyle/>
                     <a:p>
-                      <a:pPr algn="l"/>
+                      <a:pPr algn="ctr"/>
                       <a:r>
                         <a:rPr sz="1000" b="0">
                           <a:solidFill>
@@ -4733,7 +4733,7 @@
                     <a:bodyPr wrap="square"/>
                     <a:lstStyle/>
                     <a:p>
-                      <a:pPr algn="l"/>
+                      <a:pPr algn="ctr"/>
                       <a:r>
                         <a:rPr sz="1000" b="1">
                           <a:solidFill>
@@ -4778,7 +4778,7 @@
                     <a:bodyPr wrap="square"/>
                     <a:lstStyle/>
                     <a:p>
-                      <a:pPr algn="l"/>
+                      <a:pPr algn="ctr"/>
                       <a:r>
                         <a:rPr sz="1000" b="0">
                           <a:solidFill>
@@ -4788,8 +4788,21 @@
                           <a:ea typeface="맑은 고딕"/>
                           <a:cs typeface="맑은 고딕"/>
                         </a:rPr>
-                        <a:t>예약배송
-(구간당 4~5시간)</a:t>
+                        <a:t>예약배송</a:t>
+                      </a:r>
+                    </a:p>
+                    <a:p>
+                      <a:pPr algn="ctr"/>
+                      <a:r>
+                        <a:rPr sz="1000" b="0">
+                          <a:solidFill>
+                            <a:srgbClr val="000000"/>
+                          </a:solidFill>
+                          <a:latin typeface="맑은 고딕"/>
+                          <a:ea typeface="맑은 고딕"/>
+                          <a:cs typeface="맑은 고딕"/>
+                        </a:rPr>
+                        <a:t>(구간당 4~5시간)</a:t>
                       </a:r>
                     </a:p>
                   </a:txBody>
@@ -4824,7 +4837,7 @@
                     <a:bodyPr wrap="square"/>
                     <a:lstStyle/>
                     <a:p>
-                      <a:pPr algn="r"/>
+                      <a:pPr algn="ctr"/>
                       <a:r>
                         <a:rPr sz="1000" b="0">
                           <a:solidFill>
@@ -4869,7 +4882,7 @@
                     <a:bodyPr wrap="square"/>
                     <a:lstStyle/>
                     <a:p>
-                      <a:pPr algn="l"/>
+                      <a:pPr algn="ctr"/>
                       <a:r>
                         <a:rPr sz="1000" b="0">
                           <a:solidFill>
@@ -4914,7 +4927,7 @@
                     <a:bodyPr wrap="square"/>
                     <a:lstStyle/>
                     <a:p>
-                      <a:pPr algn="l"/>
+                      <a:pPr algn="ctr"/>
                       <a:r>
                         <a:rPr sz="1000" b="0">
                           <a:solidFill>
@@ -4961,7 +4974,7 @@
                     <a:bodyPr wrap="square"/>
                     <a:lstStyle/>
                     <a:p>
-                      <a:pPr algn="l"/>
+                      <a:pPr algn="ctr"/>
                       <a:r>
                         <a:rPr sz="1000" b="1">
                           <a:solidFill>
@@ -5006,7 +5019,7 @@
                     <a:bodyPr wrap="square"/>
                     <a:lstStyle/>
                     <a:p>
-                      <a:pPr algn="l"/>
+                      <a:pPr algn="ctr"/>
                       <a:r>
                         <a:rPr sz="1000" b="0">
                           <a:solidFill>
@@ -5051,7 +5064,7 @@
                     <a:bodyPr wrap="square"/>
                     <a:lstStyle/>
                     <a:p>
-                      <a:pPr algn="r"/>
+                      <a:pPr algn="ctr"/>
                       <a:r>
                         <a:rPr sz="1000" b="0">
                           <a:solidFill>
@@ -5096,7 +5109,7 @@
                     <a:bodyPr wrap="square"/>
                     <a:lstStyle/>
                     <a:p>
-                      <a:pPr algn="l"/>
+                      <a:pPr algn="ctr"/>
                       <a:r>
                         <a:rPr sz="1000" b="0">
                           <a:solidFill>
@@ -5141,7 +5154,7 @@
                     <a:bodyPr wrap="square"/>
                     <a:lstStyle/>
                     <a:p>
-                      <a:pPr algn="l"/>
+                      <a:pPr algn="ctr"/>
                       <a:r>
                         <a:rPr sz="1000" b="0">
                           <a:solidFill>
@@ -5151,8 +5164,21 @@
                           <a:ea typeface="맑은 고딕"/>
                           <a:cs typeface="맑은 고딕"/>
                         </a:rPr>
-                        <a:t>자체 물류센터 '네오' 한정
-(PP센터는 규제로 불가)</a:t>
+                        <a:t>자체 물류센터 '네오' 한정</a:t>
+                      </a:r>
+                    </a:p>
+                    <a:p>
+                      <a:pPr algn="ctr"/>
+                      <a:r>
+                        <a:rPr sz="1000" b="0">
+                          <a:solidFill>
+                            <a:srgbClr val="000000"/>
+                          </a:solidFill>
+                          <a:latin typeface="맑은 고딕"/>
+                          <a:ea typeface="맑은 고딕"/>
+                          <a:cs typeface="맑은 고딕"/>
+                        </a:rPr>
+                        <a:t>(PP센터는 규제로 불가)</a:t>
                       </a:r>
                     </a:p>
                   </a:txBody>
@@ -5189,7 +5215,7 @@
                     <a:bodyPr wrap="square"/>
                     <a:lstStyle/>
                     <a:p>
-                      <a:pPr algn="l"/>
+                      <a:pPr algn="ctr"/>
                       <a:r>
                         <a:rPr sz="1000" b="1">
                           <a:solidFill>
@@ -5234,7 +5260,7 @@
                     <a:bodyPr wrap="square"/>
                     <a:lstStyle/>
                     <a:p>
-                      <a:pPr algn="l"/>
+                      <a:pPr algn="ctr"/>
                       <a:r>
                         <a:rPr sz="1000" b="0">
                           <a:solidFill>
@@ -5279,7 +5305,7 @@
                     <a:bodyPr wrap="square"/>
                     <a:lstStyle/>
                     <a:p>
-                      <a:pPr algn="r"/>
+                      <a:pPr algn="ctr"/>
                       <a:r>
                         <a:rPr sz="1000" b="0">
                           <a:solidFill>
@@ -5324,7 +5350,7 @@
                     <a:bodyPr wrap="square"/>
                     <a:lstStyle/>
                     <a:p>
-                      <a:pPr algn="l"/>
+                      <a:pPr algn="ctr"/>
                       <a:r>
                         <a:rPr sz="1000" b="0">
                           <a:solidFill>
@@ -5369,7 +5395,7 @@
                     <a:bodyPr wrap="square"/>
                     <a:lstStyle/>
                     <a:p>
-                      <a:pPr algn="l"/>
+                      <a:pPr algn="ctr"/>
                       <a:r>
                         <a:rPr sz="1000" b="0">
                           <a:solidFill>
@@ -5416,7 +5442,7 @@
                     <a:bodyPr wrap="square"/>
                     <a:lstStyle/>
                     <a:p>
-                      <a:pPr algn="l"/>
+                      <a:pPr algn="ctr"/>
                       <a:r>
                         <a:rPr sz="1000" b="1">
                           <a:solidFill>
@@ -5461,7 +5487,7 @@
                     <a:bodyPr wrap="square"/>
                     <a:lstStyle/>
                     <a:p>
-                      <a:pPr algn="l"/>
+                      <a:pPr algn="ctr"/>
                       <a:r>
                         <a:rPr sz="1000" b="0">
                           <a:solidFill>
@@ -5471,8 +5497,21 @@
                           <a:ea typeface="맑은 고딕"/>
                           <a:cs typeface="맑은 고딕"/>
                         </a:rPr>
-                        <a:t>1시간 내외
-(반경 약 3km)</a:t>
+                        <a:t>1시간 내외</a:t>
+                      </a:r>
+                    </a:p>
+                    <a:p>
+                      <a:pPr algn="ctr"/>
+                      <a:r>
+                        <a:rPr sz="1000" b="0">
+                          <a:solidFill>
+                            <a:srgbClr val="000000"/>
+                          </a:solidFill>
+                          <a:latin typeface="맑은 고딕"/>
+                          <a:ea typeface="맑은 고딕"/>
+                          <a:cs typeface="맑은 고딕"/>
+                        </a:rPr>
+                        <a:t>(반경 약 3km)</a:t>
                       </a:r>
                     </a:p>
                   </a:txBody>
@@ -5507,7 +5546,7 @@
                     <a:bodyPr wrap="square"/>
                     <a:lstStyle/>
                     <a:p>
-                      <a:pPr algn="r"/>
+                      <a:pPr algn="ctr"/>
                       <a:r>
                         <a:rPr sz="1000" b="0">
                           <a:solidFill>
@@ -5552,7 +5591,7 @@
                     <a:bodyPr wrap="square"/>
                     <a:lstStyle/>
                     <a:p>
-                      <a:pPr algn="l"/>
+                      <a:pPr algn="ctr"/>
                       <a:r>
                         <a:rPr sz="1000" b="0">
                           <a:solidFill>
@@ -5597,7 +5636,7 @@
                     <a:bodyPr wrap="square"/>
                     <a:lstStyle/>
                     <a:p>
-                      <a:pPr algn="l"/>
+                      <a:pPr algn="ctr"/>
                       <a:r>
                         <a:rPr sz="1000" b="0">
                           <a:solidFill>
@@ -5607,8 +5646,21 @@
                           <a:ea typeface="맑은 고딕"/>
                           <a:cs typeface="맑은 고딕"/>
                         </a:rPr>
-                        <a:t>소량 위주 · 1~2인 가구 중심
-6월 매출 1월 대비 197% 증가</a:t>
+                        <a:t>소량 위주 · 1~2인 가구 중심</a:t>
+                      </a:r>
+                    </a:p>
+                    <a:p>
+                      <a:pPr algn="ctr"/>
+                      <a:r>
+                        <a:rPr sz="1000" b="0">
+                          <a:solidFill>
+                            <a:srgbClr val="000000"/>
+                          </a:solidFill>
+                          <a:latin typeface="맑은 고딕"/>
+                          <a:ea typeface="맑은 고딕"/>
+                          <a:cs typeface="맑은 고딕"/>
+                        </a:rPr>
+                        <a:t>6월 매출 1월 대비 197% 증가</a:t>
                       </a:r>
                     </a:p>
                   </a:txBody>
@@ -5645,7 +5697,7 @@
                     <a:bodyPr wrap="square"/>
                     <a:lstStyle/>
                     <a:p>
-                      <a:pPr algn="l"/>
+                      <a:pPr algn="ctr"/>
                       <a:r>
                         <a:rPr sz="1000" b="1">
                           <a:solidFill>
@@ -5690,7 +5742,7 @@
                     <a:bodyPr wrap="square"/>
                     <a:lstStyle/>
                     <a:p>
-                      <a:pPr algn="l"/>
+                      <a:pPr algn="ctr"/>
                       <a:r>
                         <a:rPr sz="1000" b="0">
                           <a:solidFill>
@@ -5700,8 +5752,21 @@
                           <a:ea typeface="맑은 고딕"/>
                           <a:cs typeface="맑은 고딕"/>
                         </a:rPr>
-                        <a:t>2시간 이내
-(20시 주문 마감)</a:t>
+                        <a:t>2시간 이내</a:t>
+                      </a:r>
+                    </a:p>
+                    <a:p>
+                      <a:pPr algn="ctr"/>
+                      <a:r>
+                        <a:rPr sz="1000" b="0">
+                          <a:solidFill>
+                            <a:srgbClr val="000000"/>
+                          </a:solidFill>
+                          <a:latin typeface="맑은 고딕"/>
+                          <a:ea typeface="맑은 고딕"/>
+                          <a:cs typeface="맑은 고딕"/>
+                        </a:rPr>
+                        <a:t>(20시 주문 마감)</a:t>
                       </a:r>
                     </a:p>
                   </a:txBody>
@@ -5736,7 +5801,7 @@
                     <a:bodyPr wrap="square"/>
                     <a:lstStyle/>
                     <a:p>
-                      <a:pPr algn="r"/>
+                      <a:pPr algn="ctr"/>
                       <a:r>
                         <a:rPr sz="1000" b="0">
                           <a:solidFill>
@@ -5781,7 +5846,7 @@
                     <a:bodyPr wrap="square"/>
                     <a:lstStyle/>
                     <a:p>
-                      <a:pPr algn="l"/>
+                      <a:pPr algn="ctr"/>
                       <a:r>
                         <a:rPr sz="1000" b="0">
                           <a:solidFill>
@@ -5826,7 +5891,7 @@
                     <a:bodyPr wrap="square"/>
                     <a:lstStyle/>
                     <a:p>
-                      <a:pPr algn="l"/>
+                      <a:pPr algn="ctr"/>
                       <a:r>
                         <a:rPr sz="1000" b="0">
                           <a:solidFill>
@@ -5836,8 +5901,21 @@
                           <a:ea typeface="맑은 고딕"/>
                           <a:cs typeface="맑은 고딕"/>
                         </a:rPr>
-                        <a:t>대용량 즉시배송
-예약배송 병행 선택 가능</a:t>
+                        <a:t>대용량 즉시배송</a:t>
+                      </a:r>
+                    </a:p>
+                    <a:p>
+                      <a:pPr algn="ctr"/>
+                      <a:r>
+                        <a:rPr sz="1000" b="0">
+                          <a:solidFill>
+                            <a:srgbClr val="000000"/>
+                          </a:solidFill>
+                          <a:latin typeface="맑은 고딕"/>
+                          <a:ea typeface="맑은 고딕"/>
+                          <a:cs typeface="맑은 고딕"/>
+                        </a:rPr>
+                        <a:t>예약배송 병행 선택 가능</a:t>
                       </a:r>
                     </a:p>
                   </a:txBody>
@@ -6400,7 +6478,7 @@
                     <a:bodyPr wrap="square"/>
                     <a:lstStyle/>
                     <a:p>
-                      <a:pPr algn="l"/>
+                      <a:pPr algn="ctr"/>
                       <a:r>
                         <a:rPr sz="1000" b="1">
                           <a:solidFill>
@@ -6490,7 +6568,7 @@
                     <a:bodyPr wrap="square"/>
                     <a:lstStyle/>
                     <a:p>
-                      <a:pPr algn="r"/>
+                      <a:pPr algn="ctr"/>
                       <a:r>
                         <a:rPr sz="1000" b="0">
                           <a:solidFill>
@@ -6537,7 +6615,7 @@
                     <a:bodyPr wrap="square"/>
                     <a:lstStyle/>
                     <a:p>
-                      <a:pPr algn="l"/>
+                      <a:pPr algn="ctr"/>
                       <a:r>
                         <a:rPr sz="1000" b="1">
                           <a:solidFill>
@@ -6627,7 +6705,7 @@
                     <a:bodyPr wrap="square"/>
                     <a:lstStyle/>
                     <a:p>
-                      <a:pPr algn="r"/>
+                      <a:pPr algn="ctr"/>
                       <a:r>
                         <a:rPr sz="1000" b="0">
                           <a:solidFill>
@@ -6674,7 +6752,7 @@
                     <a:bodyPr wrap="square"/>
                     <a:lstStyle/>
                     <a:p>
-                      <a:pPr algn="l"/>
+                      <a:pPr algn="ctr"/>
                       <a:r>
                         <a:rPr sz="1000" b="1">
                           <a:solidFill>
@@ -6764,7 +6842,7 @@
                     <a:bodyPr wrap="square"/>
                     <a:lstStyle/>
                     <a:p>
-                      <a:pPr algn="r"/>
+                      <a:pPr algn="ctr"/>
                       <a:r>
                         <a:rPr sz="1000" b="0">
                           <a:solidFill>
@@ -7254,7 +7332,7 @@
                     <a:bodyPr wrap="square"/>
                     <a:lstStyle/>
                     <a:p>
-                      <a:pPr algn="l"/>
+                      <a:pPr algn="ctr"/>
                       <a:r>
                         <a:rPr sz="1000" b="1">
                           <a:solidFill>
@@ -7299,7 +7377,7 @@
                     <a:bodyPr wrap="square"/>
                     <a:lstStyle/>
                     <a:p>
-                      <a:pPr algn="l"/>
+                      <a:pPr algn="ctr"/>
                       <a:r>
                         <a:rPr sz="1000" b="0">
                           <a:solidFill>
@@ -7346,7 +7424,7 @@
                     <a:bodyPr wrap="square"/>
                     <a:lstStyle/>
                     <a:p>
-                      <a:pPr algn="l"/>
+                      <a:pPr algn="ctr"/>
                       <a:r>
                         <a:rPr sz="1000" b="1">
                           <a:solidFill>
@@ -7391,7 +7469,7 @@
                     <a:bodyPr wrap="square"/>
                     <a:lstStyle/>
                     <a:p>
-                      <a:pPr algn="l"/>
+                      <a:pPr algn="ctr"/>
                       <a:r>
                         <a:rPr sz="1000" b="0">
                           <a:solidFill>
@@ -7438,7 +7516,7 @@
                     <a:bodyPr wrap="square"/>
                     <a:lstStyle/>
                     <a:p>
-                      <a:pPr algn="l"/>
+                      <a:pPr algn="ctr"/>
                       <a:r>
                         <a:rPr sz="1000" b="1">
                           <a:solidFill>
@@ -7483,7 +7561,7 @@
                     <a:bodyPr wrap="square"/>
                     <a:lstStyle/>
                     <a:p>
-                      <a:pPr algn="l"/>
+                      <a:pPr algn="ctr"/>
                       <a:r>
                         <a:rPr sz="1000" b="0">
                           <a:solidFill>
@@ -7530,7 +7608,7 @@
                     <a:bodyPr wrap="square"/>
                     <a:lstStyle/>
                     <a:p>
-                      <a:pPr algn="l"/>
+                      <a:pPr algn="ctr"/>
                       <a:r>
                         <a:rPr sz="1000" b="1">
                           <a:solidFill>
@@ -7575,7 +7653,7 @@
                     <a:bodyPr wrap="square"/>
                     <a:lstStyle/>
                     <a:p>
-                      <a:pPr algn="l"/>
+                      <a:pPr algn="ctr"/>
                       <a:r>
                         <a:rPr sz="1000" b="0">
                           <a:solidFill>

--- a/reports/ssg-delivery-report.pptx
+++ b/reports/ssg-delivery-report.pptx
@@ -3513,8 +3513,8 @@
         </p:nvSpPr>
         <p:spPr>
           <a:xfrm>
-            <a:off x="417600" y="432000"/>
-            <a:ext cx="9086400" cy="324000"/>
+            <a:off x="435600" y="432000"/>
+            <a:ext cx="9050400" cy="324000"/>
           </a:xfrm>
           <a:prstGeom prst="rect">
             <a:avLst/>
@@ -3561,8 +3561,8 @@
         </p:nvSpPr>
         <p:spPr>
           <a:xfrm>
-            <a:off x="417600" y="1044000"/>
-            <a:ext cx="7848000" cy="234000"/>
+            <a:off x="435600" y="1044000"/>
+            <a:ext cx="7830000" cy="234000"/>
           </a:xfrm>
           <a:prstGeom prst="rect">
             <a:avLst/>
@@ -3585,7 +3585,7 @@
                 <a:ea typeface="맑은 고딕"/>
                 <a:cs typeface="맑은 고딕"/>
               </a:rPr>
-              <a:t>■ 양재·하남점 '2시간 내 배송' 시범 도입 — 대용량 장보기 공략, PP센터 가동률 제고</a:t>
+              <a:t>■ 양재·하남점 '2시간 배송' 시범 도입 — 대용량 장보기 공략·PP센터 가동률 제고</a:t>
             </a:r>
           </a:p>
         </p:txBody>
@@ -3598,7 +3598,7 @@
         </p:nvSpPr>
         <p:spPr>
           <a:xfrm>
-            <a:off x="374400" y="6443999"/>
+            <a:off x="392400" y="6443999"/>
             <a:ext cx="6480000" cy="198000"/>
           </a:xfrm>
           <a:prstGeom prst="rect">
@@ -3622,7 +3622,7 @@
                 <a:ea typeface="맑은 고딕"/>
                 <a:cs typeface="맑은 고딕"/>
               </a:rPr>
-              <a:t>※ 출처 : 비즈워치 「SSG닷컴, '2시간 실험'에 나선 진짜 이유는」('26. 7. 10. 정혜인 기자)</a:t>
+              <a:t>※ 출처 : 비즈워치 「SSG닷컴, '2시간 실험'에 나선 진짜 이유는」('26. 7. 10.)</a:t>
             </a:r>
           </a:p>
         </p:txBody>
@@ -3635,45 +3635,8 @@
         </p:nvSpPr>
         <p:spPr>
           <a:xfrm>
-            <a:off x="9151200" y="6562800"/>
-            <a:ext cx="756000" cy="216000"/>
-          </a:xfrm>
-          <a:prstGeom prst="rect">
-            <a:avLst/>
-          </a:prstGeom>
-          <a:noFill/>
-        </p:spPr>
-        <p:txBody>
-          <a:bodyPr wrap="square" anchor="t" lIns="0" rIns="0" tIns="0" bIns="0">
-            <a:spAutoFit/>
-          </a:bodyPr>
-          <a:lstStyle/>
-          <a:p>
-            <a:pPr algn="r"/>
-            <a:r>
-              <a:rPr sz="1000" b="0">
-                <a:solidFill>
-                  <a:srgbClr val="000000"/>
-                </a:solidFill>
-                <a:latin typeface="맑은 고딕"/>
-                <a:ea typeface="맑은 고딕"/>
-                <a:cs typeface="맑은 고딕"/>
-              </a:rPr>
-              <a:t>3/7</a:t>
-            </a:r>
-          </a:p>
-        </p:txBody>
-      </p:sp>
-      <p:sp>
-        <p:nvSpPr>
-          <p:cNvPr id="6" name="TextBox 5"/>
-          <p:cNvSpPr txBox="1"/>
-          <p:nvPr/>
-        </p:nvSpPr>
-        <p:spPr>
-          <a:xfrm>
-            <a:off x="406799" y="1475999"/>
-            <a:ext cx="9093600" cy="345600"/>
+            <a:off x="424800" y="1475999"/>
+            <a:ext cx="9057600" cy="345600"/>
           </a:xfrm>
           <a:prstGeom prst="rect">
             <a:avLst/>
@@ -3696,21 +3659,21 @@
                 <a:ea typeface="맑은 고딕"/>
                 <a:cs typeface="맑은 고딕"/>
               </a:rPr>
-              <a:t>• '26. 7. 9.부터 이마트 양재점·하남점 인근 고객 대상 '2시간 내 배송' 시범 운영 개시</a:t>
-            </a:r>
-          </a:p>
-        </p:txBody>
-      </p:sp>
-      <p:sp>
-        <p:nvSpPr>
-          <p:cNvPr id="7" name="TextBox 6"/>
+              <a:t>• '26. 7. 9. 이마트 양재·하남점 시범 개시</a:t>
+            </a:r>
+          </a:p>
+        </p:txBody>
+      </p:sp>
+      <p:sp>
+        <p:nvSpPr>
+          <p:cNvPr id="6" name="TextBox 5"/>
           <p:cNvSpPr txBox="1"/>
           <p:nvPr/>
         </p:nvSpPr>
         <p:spPr>
           <a:xfrm>
-            <a:off x="604800" y="1821599"/>
-            <a:ext cx="8895600" cy="345600"/>
+            <a:off x="622800" y="1821599"/>
+            <a:ext cx="8859600" cy="345600"/>
           </a:xfrm>
           <a:prstGeom prst="rect">
             <a:avLst/>
@@ -3733,21 +3696,21 @@
                 <a:ea typeface="맑은 고딕"/>
                 <a:cs typeface="맑은 고딕"/>
               </a:rPr>
-              <a:t>- 오후 8시까지 주문 시 결제 시점 기준 2시간 내 배송 완료, 기존 예약배송과 병행 선택 가능</a:t>
-            </a:r>
-          </a:p>
-        </p:txBody>
-      </p:sp>
-      <p:sp>
-        <p:nvSpPr>
-          <p:cNvPr id="8" name="TextBox 7"/>
+              <a:t>- 20시 주문 마감 → 결제 후 2시간 내 배송, 예약배송 병행</a:t>
+            </a:r>
+          </a:p>
+        </p:txBody>
+      </p:sp>
+      <p:sp>
+        <p:nvSpPr>
+          <p:cNvPr id="7" name="TextBox 6"/>
           <p:cNvSpPr txBox="1"/>
           <p:nvPr/>
         </p:nvSpPr>
         <p:spPr>
           <a:xfrm>
-            <a:off x="406799" y="2167200"/>
-            <a:ext cx="9093600" cy="345600"/>
+            <a:off x="424800" y="2167200"/>
+            <a:ext cx="9057600" cy="345600"/>
           </a:xfrm>
           <a:prstGeom prst="rect">
             <a:avLst/>
@@ -3770,21 +3733,21 @@
                 <a:ea typeface="맑은 고딕"/>
                 <a:cs typeface="맑은 고딕"/>
               </a:rPr>
-              <a:t>• 이륜차 퀵커머스(바로퀵)로 소화 불가한 3~4인 가구 대용량 장보기 수요를 사륜차로 흡수</a:t>
-            </a:r>
-          </a:p>
-        </p:txBody>
-      </p:sp>
-      <p:sp>
-        <p:nvSpPr>
-          <p:cNvPr id="9" name="TextBox 8"/>
+              <a:t>• 대용량 장보기 수요를 사륜차로 흡수</a:t>
+            </a:r>
+          </a:p>
+        </p:txBody>
+      </p:sp>
+      <p:sp>
+        <p:nvSpPr>
+          <p:cNvPr id="8" name="TextBox 7"/>
           <p:cNvSpPr txBox="1"/>
           <p:nvPr/>
         </p:nvSpPr>
         <p:spPr>
           <a:xfrm>
-            <a:off x="406799" y="2512800"/>
-            <a:ext cx="9093600" cy="345600"/>
+            <a:off x="424800" y="2512800"/>
+            <a:ext cx="9057600" cy="345600"/>
           </a:xfrm>
           <a:prstGeom prst="rect">
             <a:avLst/>
@@ -3807,22 +3770,22 @@
                 <a:ea typeface="맑은 고딕"/>
                 <a:cs typeface="맑은 고딕"/>
               </a:rPr>
-              <a:t>• 새벽배송이 막힌 이마트 점포(PP센터)의 낮 시간대 가동률 제고 포석</a:t>
+              <a:t>• 새벽배송 막힌 PP센터의 낮 가동률 제고</a:t>
             </a:r>
           </a:p>
         </p:txBody>
       </p:sp>
       <p:graphicFrame>
         <p:nvGraphicFramePr>
-          <p:cNvPr id="10" name="Table 9"/>
+          <p:cNvPr id="9" name="Table 8"/>
           <p:cNvGraphicFramePr>
             <a:graphicFrameLocks noGrp="1"/>
           </p:cNvGraphicFramePr>
           <p:nvPr/>
         </p:nvGraphicFramePr>
         <p:xfrm>
-          <a:off x="406799" y="3038400"/>
-          <a:ext cx="9093600" cy="1584000"/>
+          <a:off x="424800" y="3038400"/>
+          <a:ext cx="9057600" cy="1584000"/>
         </p:xfrm>
         <a:graphic>
           <a:graphicData uri="http://schemas.openxmlformats.org/drawingml/2006/table">
@@ -3832,7 +3795,7 @@
               </a:tblPr>
               <a:tblGrid>
                 <a:gridCol w="2160000"/>
-                <a:gridCol w="6933600"/>
+                <a:gridCol w="6897600"/>
               </a:tblGrid>
               <a:tr h="316800">
                 <a:tc>
@@ -3987,7 +3950,7 @@
                           <a:ea typeface="맑은 고딕"/>
                           <a:cs typeface="맑은 고딕"/>
                         </a:rPr>
-                        <a:t>이마트 양재점 · 하남점 ('26. 7. 9. 개시)</a:t>
+                        <a:t>이마트 양재점 · 하남점</a:t>
                       </a:r>
                     </a:p>
                   </a:txBody>
@@ -4171,7 +4134,7 @@
                           <a:ea typeface="맑은 고딕"/>
                           <a:cs typeface="맑은 고딕"/>
                         </a:rPr>
-                        <a:t>결제 시점 기준 2시간 이내</a:t>
+                        <a:t>결제 후 2시간 이내</a:t>
                       </a:r>
                     </a:p>
                   </a:txBody>
@@ -4263,7 +4226,7 @@
                           <a:ea typeface="맑은 고딕"/>
                           <a:cs typeface="맑은 고딕"/>
                         </a:rPr>
-                        <a:t>쓱배송 사륜 배송 차량 (대용량·중량 상품 대응)</a:t>
+                        <a:t>쓱배송 사륜 차량</a:t>
                       </a:r>
                     </a:p>
                   </a:txBody>
@@ -4324,8 +4287,8 @@
         </p:nvSpPr>
         <p:spPr>
           <a:xfrm>
-            <a:off x="417600" y="432000"/>
-            <a:ext cx="9086400" cy="324000"/>
+            <a:off x="435600" y="432000"/>
+            <a:ext cx="9050400" cy="324000"/>
           </a:xfrm>
           <a:prstGeom prst="rect">
             <a:avLst/>
@@ -4372,8 +4335,8 @@
         </p:nvSpPr>
         <p:spPr>
           <a:xfrm>
-            <a:off x="417600" y="1044000"/>
-            <a:ext cx="7848000" cy="234000"/>
+            <a:off x="435600" y="1044000"/>
+            <a:ext cx="7830000" cy="234000"/>
           </a:xfrm>
           <a:prstGeom prst="rect">
             <a:avLst/>
@@ -4409,7 +4372,7 @@
         </p:nvSpPr>
         <p:spPr>
           <a:xfrm>
-            <a:off x="374400" y="6443999"/>
+            <a:off x="392400" y="6443999"/>
             <a:ext cx="6480000" cy="198000"/>
           </a:xfrm>
           <a:prstGeom prst="rect">
@@ -4438,54 +4401,17 @@
           </a:p>
         </p:txBody>
       </p:sp>
-      <p:sp>
-        <p:nvSpPr>
-          <p:cNvPr id="5" name="TextBox 4"/>
-          <p:cNvSpPr txBox="1"/>
-          <p:nvPr/>
-        </p:nvSpPr>
-        <p:spPr>
-          <a:xfrm>
-            <a:off x="9151200" y="6562800"/>
-            <a:ext cx="756000" cy="216000"/>
-          </a:xfrm>
-          <a:prstGeom prst="rect">
-            <a:avLst/>
-          </a:prstGeom>
-          <a:noFill/>
-        </p:spPr>
-        <p:txBody>
-          <a:bodyPr wrap="square" anchor="t" lIns="0" rIns="0" tIns="0" bIns="0">
-            <a:spAutoFit/>
-          </a:bodyPr>
-          <a:lstStyle/>
-          <a:p>
-            <a:pPr algn="r"/>
-            <a:r>
-              <a:rPr sz="1000" b="0">
-                <a:solidFill>
-                  <a:srgbClr val="000000"/>
-                </a:solidFill>
-                <a:latin typeface="맑은 고딕"/>
-                <a:ea typeface="맑은 고딕"/>
-                <a:cs typeface="맑은 고딕"/>
-              </a:rPr>
-              <a:t>4/7</a:t>
-            </a:r>
-          </a:p>
-        </p:txBody>
-      </p:sp>
       <p:graphicFrame>
         <p:nvGraphicFramePr>
-          <p:cNvPr id="6" name="Table 5"/>
+          <p:cNvPr id="5" name="Table 4"/>
           <p:cNvGraphicFramePr>
             <a:graphicFrameLocks noGrp="1"/>
           </p:cNvGraphicFramePr>
           <p:nvPr/>
         </p:nvGraphicFramePr>
         <p:xfrm>
-          <a:off x="406799" y="1475999"/>
-          <a:ext cx="9093599" cy="3816000"/>
+          <a:off x="424800" y="1475999"/>
+          <a:ext cx="9057599" cy="3816000"/>
         </p:xfrm>
         <a:graphic>
           <a:graphicData uri="http://schemas.openxmlformats.org/drawingml/2006/table">
@@ -4498,7 +4424,7 @@
                 <a:gridCol w="1692000"/>
                 <a:gridCol w="1080000"/>
                 <a:gridCol w="1440000"/>
-                <a:gridCol w="3225600"/>
+                <a:gridCol w="3189600"/>
               </a:tblGrid>
               <a:tr h="636000">
                 <a:tc>
@@ -4937,7 +4863,7 @@
                           <a:ea typeface="맑은 고딕"/>
                           <a:cs typeface="맑은 고딕"/>
                         </a:rPr>
-                        <a:t>지역별 2~5개 시간 구간 운영</a:t>
+                        <a:t>지역별 2~5개 구간</a:t>
                       </a:r>
                     </a:p>
                   </a:txBody>
@@ -5119,7 +5045,7 @@
                           <a:ea typeface="맑은 고딕"/>
                           <a:cs typeface="맑은 고딕"/>
                         </a:rPr>
-                        <a:t>네오 취급 상품</a:t>
+                        <a:t>네오 상품</a:t>
                       </a:r>
                     </a:p>
                   </a:txBody>
@@ -5164,7 +5090,7 @@
                           <a:ea typeface="맑은 고딕"/>
                           <a:cs typeface="맑은 고딕"/>
                         </a:rPr>
-                        <a:t>자체 물류센터 '네오' 한정</a:t>
+                        <a:t>네오 한정</a:t>
                       </a:r>
                     </a:p>
                     <a:p>
@@ -5178,7 +5104,7 @@
                           <a:ea typeface="맑은 고딕"/>
                           <a:cs typeface="맑은 고딕"/>
                         </a:rPr>
-                        <a:t>(PP센터는 규제로 불가)</a:t>
+                        <a:t>(PP센터 불가)</a:t>
                       </a:r>
                     </a:p>
                   </a:txBody>
@@ -5405,7 +5331,7 @@
                           <a:ea typeface="맑은 고딕"/>
                           <a:cs typeface="맑은 고딕"/>
                         </a:rPr>
-                        <a:t>쓱배송의 한 축</a:t>
+                        <a:t>—</a:t>
                       </a:r>
                     </a:p>
                   </a:txBody>
@@ -5497,7 +5423,7 @@
                           <a:ea typeface="맑은 고딕"/>
                           <a:cs typeface="맑은 고딕"/>
                         </a:rPr>
-                        <a:t>1시간 내외</a:t>
+                        <a:t>1시간 내</a:t>
                       </a:r>
                     </a:p>
                     <a:p>
@@ -5511,7 +5437,7 @@
                           <a:ea typeface="맑은 고딕"/>
                           <a:cs typeface="맑은 고딕"/>
                         </a:rPr>
-                        <a:t>(반경 약 3km)</a:t>
+                        <a:t>(반경 3km)</a:t>
                       </a:r>
                     </a:p>
                   </a:txBody>
@@ -5646,7 +5572,7 @@
                           <a:ea typeface="맑은 고딕"/>
                           <a:cs typeface="맑은 고딕"/>
                         </a:rPr>
-                        <a:t>소량 위주 · 1~2인 가구 중심</a:t>
+                        <a:t>소량·1~2인 가구</a:t>
                       </a:r>
                     </a:p>
                     <a:p>
@@ -5660,7 +5586,7 @@
                           <a:ea typeface="맑은 고딕"/>
                           <a:cs typeface="맑은 고딕"/>
                         </a:rPr>
-                        <a:t>6월 매출 1월 대비 197% 증가</a:t>
+                        <a:t>매출 197%↑(6월, 1월比)</a:t>
                       </a:r>
                     </a:p>
                   </a:txBody>
@@ -5752,7 +5678,7 @@
                           <a:ea typeface="맑은 고딕"/>
                           <a:cs typeface="맑은 고딕"/>
                         </a:rPr>
-                        <a:t>2시간 이내</a:t>
+                        <a:t>2시간 내</a:t>
                       </a:r>
                     </a:p>
                     <a:p>
@@ -5766,7 +5692,7 @@
                           <a:ea typeface="맑은 고딕"/>
                           <a:cs typeface="맑은 고딕"/>
                         </a:rPr>
-                        <a:t>(20시 주문 마감)</a:t>
+                        <a:t>(20시 마감)</a:t>
                       </a:r>
                     </a:p>
                   </a:txBody>
@@ -5856,7 +5782,7 @@
                           <a:ea typeface="맑은 고딕"/>
                           <a:cs typeface="맑은 고딕"/>
                         </a:rPr>
-                        <a:t>약 15만 종 기반</a:t>
+                        <a:t>약 15만 종</a:t>
                       </a:r>
                     </a:p>
                   </a:txBody>
@@ -5915,7 +5841,7 @@
                           <a:ea typeface="맑은 고딕"/>
                           <a:cs typeface="맑은 고딕"/>
                         </a:rPr>
-                        <a:t>예약배송 병행 선택 가능</a:t>
+                        <a:t>예약배송 병행</a:t>
                       </a:r>
                     </a:p>
                   </a:txBody>
@@ -5976,8 +5902,8 @@
         </p:nvSpPr>
         <p:spPr>
           <a:xfrm>
-            <a:off x="417600" y="432000"/>
-            <a:ext cx="9086400" cy="324000"/>
+            <a:off x="435600" y="432000"/>
+            <a:ext cx="9050400" cy="324000"/>
           </a:xfrm>
           <a:prstGeom prst="rect">
             <a:avLst/>
@@ -6024,8 +5950,8 @@
         </p:nvSpPr>
         <p:spPr>
           <a:xfrm>
-            <a:off x="417600" y="1044000"/>
-            <a:ext cx="7848000" cy="234000"/>
+            <a:off x="435600" y="1044000"/>
+            <a:ext cx="7830000" cy="234000"/>
           </a:xfrm>
           <a:prstGeom prst="rect">
             <a:avLst/>
@@ -6061,7 +5987,7 @@
         </p:nvSpPr>
         <p:spPr>
           <a:xfrm>
-            <a:off x="8316000" y="846000"/>
+            <a:off x="8294400" y="846000"/>
             <a:ext cx="1188000" cy="216000"/>
           </a:xfrm>
           <a:prstGeom prst="rect">
@@ -6085,7 +6011,7 @@
                 <a:ea typeface="맑은 고딕"/>
                 <a:cs typeface="맑은 고딕"/>
               </a:rPr>
-              <a:t>(단위 : 종, %)</a:t>
+              <a:t>(단위 : 종)</a:t>
             </a:r>
           </a:p>
         </p:txBody>
@@ -6098,7 +6024,7 @@
         </p:nvSpPr>
         <p:spPr>
           <a:xfrm>
-            <a:off x="374400" y="6443999"/>
+            <a:off x="392400" y="6443999"/>
             <a:ext cx="6480000" cy="198000"/>
           </a:xfrm>
           <a:prstGeom prst="rect">
@@ -6122,7 +6048,7 @@
                 <a:ea typeface="맑은 고딕"/>
                 <a:cs typeface="맑은 고딕"/>
               </a:rPr>
-              <a:t>※ 출처 : 비즈워치 「SSG닷컴, '2시간 실험'에 나선 진짜 이유는」('26. 7. 10. 정혜인 기자)</a:t>
+              <a:t>※ 출처 : 비즈워치 「SSG닷컴, '2시간 실험'에 나선 진짜 이유는」('26. 7. 10.)</a:t>
             </a:r>
           </a:p>
         </p:txBody>
@@ -6135,45 +6061,8 @@
         </p:nvSpPr>
         <p:spPr>
           <a:xfrm>
-            <a:off x="9151200" y="6562800"/>
-            <a:ext cx="756000" cy="216000"/>
-          </a:xfrm>
-          <a:prstGeom prst="rect">
-            <a:avLst/>
-          </a:prstGeom>
-          <a:noFill/>
-        </p:spPr>
-        <p:txBody>
-          <a:bodyPr wrap="square" anchor="t" lIns="0" rIns="0" tIns="0" bIns="0">
-            <a:spAutoFit/>
-          </a:bodyPr>
-          <a:lstStyle/>
-          <a:p>
-            <a:pPr algn="r"/>
-            <a:r>
-              <a:rPr sz="1000" b="0">
-                <a:solidFill>
-                  <a:srgbClr val="000000"/>
-                </a:solidFill>
-                <a:latin typeface="맑은 고딕"/>
-                <a:ea typeface="맑은 고딕"/>
-                <a:cs typeface="맑은 고딕"/>
-              </a:rPr>
-              <a:t>5/7</a:t>
-            </a:r>
-          </a:p>
-        </p:txBody>
-      </p:sp>
-      <p:sp>
-        <p:nvSpPr>
-          <p:cNvPr id="7" name="TextBox 6"/>
-          <p:cNvSpPr txBox="1"/>
-          <p:nvPr/>
-        </p:nvSpPr>
-        <p:spPr>
-          <a:xfrm>
-            <a:off x="406799" y="1475999"/>
-            <a:ext cx="9093600" cy="345600"/>
+            <a:off x="424800" y="1475999"/>
+            <a:ext cx="9057600" cy="345600"/>
           </a:xfrm>
           <a:prstGeom prst="rect">
             <a:avLst/>
@@ -6196,21 +6085,21 @@
                 <a:ea typeface="맑은 고딕"/>
                 <a:cs typeface="맑은 고딕"/>
               </a:rPr>
-              <a:t>• 이륜차 퀵커머스는 적재량 제약으로 소량 배송에 한정 → 대형마트 주력인 3~4인 가족 대용량 장보기 공백</a:t>
-            </a:r>
-          </a:p>
-        </p:txBody>
-      </p:sp>
-      <p:sp>
-        <p:nvSpPr>
-          <p:cNvPr id="8" name="TextBox 7"/>
+              <a:t>• 이륜차 적재 한계 → 대용량 장보기 공백</a:t>
+            </a:r>
+          </a:p>
+        </p:txBody>
+      </p:sp>
+      <p:sp>
+        <p:nvSpPr>
+          <p:cNvPr id="7" name="TextBox 6"/>
           <p:cNvSpPr txBox="1"/>
           <p:nvPr/>
         </p:nvSpPr>
         <p:spPr>
           <a:xfrm>
-            <a:off x="406799" y="1821599"/>
-            <a:ext cx="9093600" cy="345600"/>
+            <a:off x="424800" y="1821599"/>
+            <a:ext cx="9057600" cy="345600"/>
           </a:xfrm>
           <a:prstGeom prst="rect">
             <a:avLst/>
@@ -6233,21 +6122,21 @@
                 <a:ea typeface="맑은 고딕"/>
                 <a:cs typeface="맑은 고딕"/>
               </a:rPr>
-              <a:t>• 바로퀵 6월 매출 '26. 1월 대비 197% 증가 → 온디맨드 장보기 수요 실증 후 서비스 확대</a:t>
-            </a:r>
-          </a:p>
-        </p:txBody>
-      </p:sp>
-      <p:sp>
-        <p:nvSpPr>
-          <p:cNvPr id="9" name="TextBox 8"/>
+              <a:t>• 바로퀵 매출 197%↑(6월, 1월比) → 수요 실증</a:t>
+            </a:r>
+          </a:p>
+        </p:txBody>
+      </p:sp>
+      <p:sp>
+        <p:nvSpPr>
+          <p:cNvPr id="8" name="TextBox 7"/>
           <p:cNvSpPr txBox="1"/>
           <p:nvPr/>
         </p:nvSpPr>
         <p:spPr>
           <a:xfrm>
-            <a:off x="406799" y="2167200"/>
-            <a:ext cx="9093600" cy="345600"/>
+            <a:off x="424800" y="2167200"/>
+            <a:ext cx="9057600" cy="345600"/>
           </a:xfrm>
           <a:prstGeom prst="rect">
             <a:avLst/>
@@ -6270,21 +6159,21 @@
                 <a:ea typeface="맑은 고딕"/>
                 <a:cs typeface="맑은 고딕"/>
               </a:rPr>
-              <a:t>• 1시간(소량·이륜차) / 2시간(대용량·사륜차) 이원화로 퀵커머스 수요 세분화 대응</a:t>
-            </a:r>
-          </a:p>
-        </p:txBody>
-      </p:sp>
-      <p:sp>
-        <p:nvSpPr>
-          <p:cNvPr id="10" name="TextBox 9"/>
+              <a:t>• 1시간(소량·이륜차) / 2시간(대용량·사륜차) 이원화</a:t>
+            </a:r>
+          </a:p>
+        </p:txBody>
+      </p:sp>
+      <p:sp>
+        <p:nvSpPr>
+          <p:cNvPr id="9" name="TextBox 8"/>
           <p:cNvSpPr txBox="1"/>
           <p:nvPr/>
         </p:nvSpPr>
         <p:spPr>
           <a:xfrm>
-            <a:off x="406799" y="2512800"/>
-            <a:ext cx="9093600" cy="345600"/>
+            <a:off x="424800" y="2512800"/>
+            <a:ext cx="9057600" cy="345600"/>
           </a:xfrm>
           <a:prstGeom prst="rect">
             <a:avLst/>
@@ -6307,22 +6196,22 @@
                 <a:ea typeface="맑은 고딕"/>
                 <a:cs typeface="맑은 고딕"/>
               </a:rPr>
-              <a:t>• 퀵커머스 1위 B마트도 대용량 휴지·계란 30구 등 품목 다변화 및 일부 사륜차 배송 병행</a:t>
+              <a:t>• B마트도 대용량 품목 확대·사륜차 병행</a:t>
             </a:r>
           </a:p>
         </p:txBody>
       </p:sp>
       <p:graphicFrame>
         <p:nvGraphicFramePr>
-          <p:cNvPr id="11" name="Table 10"/>
+          <p:cNvPr id="10" name="Table 9"/>
           <p:cNvGraphicFramePr>
             <a:graphicFrameLocks noGrp="1"/>
           </p:cNvGraphicFramePr>
           <p:nvPr/>
         </p:nvGraphicFramePr>
         <p:xfrm>
-          <a:off x="406799" y="3038400"/>
-          <a:ext cx="9093600" cy="1296000"/>
+          <a:off x="424800" y="3038400"/>
+          <a:ext cx="9057600" cy="1296000"/>
         </p:xfrm>
         <a:graphic>
           <a:graphicData uri="http://schemas.openxmlformats.org/drawingml/2006/table">
@@ -6333,7 +6222,7 @@
               <a:tblGrid>
                 <a:gridCol w="3240000"/>
                 <a:gridCol w="2160000"/>
-                <a:gridCol w="3693600"/>
+                <a:gridCol w="3657600"/>
               </a:tblGrid>
               <a:tr h="324000">
                 <a:tc>
@@ -6488,7 +6377,7 @@
                           <a:ea typeface="맑은 고딕"/>
                           <a:cs typeface="맑은 고딕"/>
                         </a:rPr>
-                        <a:t>이마트 점포 (2시간 배송 기반)</a:t>
+                        <a:t>이마트 점포</a:t>
                       </a:r>
                     </a:p>
                   </a:txBody>
@@ -6578,7 +6467,7 @@
                           <a:ea typeface="맑은 고딕"/>
                           <a:cs typeface="맑은 고딕"/>
                         </a:rPr>
-                        <a:t>점포당 평균 기준</a:t>
+                        <a:t>점포당 평균</a:t>
                       </a:r>
                     </a:p>
                   </a:txBody>
@@ -6715,7 +6604,7 @@
                           <a:ea typeface="맑은 고딕"/>
                           <a:cs typeface="맑은 고딕"/>
                         </a:rPr>
-                        <a:t>이륜차 적재량 한계</a:t>
+                        <a:t>이륜차 적재 한계</a:t>
                       </a:r>
                     </a:p>
                   </a:txBody>
@@ -6762,7 +6651,7 @@
                           <a:ea typeface="맑은 고딕"/>
                           <a:cs typeface="맑은 고딕"/>
                         </a:rPr>
-                        <a:t>B마트 (배달의민족)</a:t>
+                        <a:t>B마트</a:t>
                       </a:r>
                     </a:p>
                   </a:txBody>
@@ -6852,7 +6741,7 @@
                           <a:ea typeface="맑은 고딕"/>
                           <a:cs typeface="맑은 고딕"/>
                         </a:rPr>
-                        <a:t>퀵커머스 시장 1위</a:t>
+                        <a:t>퀵커머스 1위</a:t>
                       </a:r>
                     </a:p>
                   </a:txBody>
@@ -6913,8 +6802,8 @@
         </p:nvSpPr>
         <p:spPr>
           <a:xfrm>
-            <a:off x="417600" y="432000"/>
-            <a:ext cx="9086400" cy="324000"/>
+            <a:off x="435600" y="432000"/>
+            <a:ext cx="9050400" cy="324000"/>
           </a:xfrm>
           <a:prstGeom prst="rect">
             <a:avLst/>
@@ -6961,8 +6850,8 @@
         </p:nvSpPr>
         <p:spPr>
           <a:xfrm>
-            <a:off x="417600" y="1044000"/>
-            <a:ext cx="7848000" cy="234000"/>
+            <a:off x="435600" y="1044000"/>
+            <a:ext cx="7830000" cy="234000"/>
           </a:xfrm>
           <a:prstGeom prst="rect">
             <a:avLst/>
@@ -6998,7 +6887,7 @@
         </p:nvSpPr>
         <p:spPr>
           <a:xfrm>
-            <a:off x="374400" y="6443999"/>
+            <a:off x="392400" y="6443999"/>
             <a:ext cx="6480000" cy="198000"/>
           </a:xfrm>
           <a:prstGeom prst="rect">
@@ -7022,7 +6911,7 @@
                 <a:ea typeface="맑은 고딕"/>
                 <a:cs typeface="맑은 고딕"/>
               </a:rPr>
-              <a:t>※ 유통산업발전법('12년 도입) : 대형마트 영업 자정~오전 10시 제한 · 월 2회 의무휴업</a:t>
+              <a:t>※ 유통산업발전법('12년) : 대형마트 영업 0~10시 제한 · 월 2회 의무휴업</a:t>
             </a:r>
           </a:p>
         </p:txBody>
@@ -7035,45 +6924,8 @@
         </p:nvSpPr>
         <p:spPr>
           <a:xfrm>
-            <a:off x="9151200" y="6562800"/>
-            <a:ext cx="756000" cy="216000"/>
-          </a:xfrm>
-          <a:prstGeom prst="rect">
-            <a:avLst/>
-          </a:prstGeom>
-          <a:noFill/>
-        </p:spPr>
-        <p:txBody>
-          <a:bodyPr wrap="square" anchor="t" lIns="0" rIns="0" tIns="0" bIns="0">
-            <a:spAutoFit/>
-          </a:bodyPr>
-          <a:lstStyle/>
-          <a:p>
-            <a:pPr algn="r"/>
-            <a:r>
-              <a:rPr sz="1000" b="0">
-                <a:solidFill>
-                  <a:srgbClr val="000000"/>
-                </a:solidFill>
-                <a:latin typeface="맑은 고딕"/>
-                <a:ea typeface="맑은 고딕"/>
-                <a:cs typeface="맑은 고딕"/>
-              </a:rPr>
-              <a:t>6/7</a:t>
-            </a:r>
-          </a:p>
-        </p:txBody>
-      </p:sp>
-      <p:sp>
-        <p:nvSpPr>
-          <p:cNvPr id="6" name="TextBox 5"/>
-          <p:cNvSpPr txBox="1"/>
-          <p:nvPr/>
-        </p:nvSpPr>
-        <p:spPr>
-          <a:xfrm>
-            <a:off x="406799" y="1475999"/>
-            <a:ext cx="9093600" cy="345600"/>
+            <a:off x="424800" y="1475999"/>
+            <a:ext cx="9057600" cy="345600"/>
           </a:xfrm>
           <a:prstGeom prst="rect">
             <a:avLst/>
@@ -7096,21 +6948,21 @@
                 <a:ea typeface="맑은 고딕"/>
                 <a:cs typeface="맑은 고딕"/>
               </a:rPr>
-              <a:t>• 전국 160여 이마트 점포(PP센터)는 유통산업발전법상 새벽 시간대 가동 불가</a:t>
-            </a:r>
-          </a:p>
-        </p:txBody>
-      </p:sp>
-      <p:sp>
-        <p:nvSpPr>
-          <p:cNvPr id="7" name="TextBox 6"/>
+              <a:t>• 160여 PP센터, 유통법상 새벽 가동 불가</a:t>
+            </a:r>
+          </a:p>
+        </p:txBody>
+      </p:sp>
+      <p:sp>
+        <p:nvSpPr>
+          <p:cNvPr id="6" name="TextBox 5"/>
           <p:cNvSpPr txBox="1"/>
           <p:nvPr/>
         </p:nvSpPr>
         <p:spPr>
           <a:xfrm>
-            <a:off x="604800" y="1821599"/>
-            <a:ext cx="8895600" cy="345600"/>
+            <a:off x="622800" y="1821599"/>
+            <a:ext cx="8859600" cy="345600"/>
           </a:xfrm>
           <a:prstGeom prst="rect">
             <a:avLst/>
@@ -7133,21 +6985,21 @@
                 <a:ea typeface="맑은 고딕"/>
                 <a:cs typeface="맑은 고딕"/>
               </a:rPr>
-              <a:t>- 바로퀵 · 2시간 배송으로 낮 시간대 PP센터 가동률 제고 → 규제 하 물류거점 활용 극대화</a:t>
-            </a:r>
-          </a:p>
-        </p:txBody>
-      </p:sp>
-      <p:sp>
-        <p:nvSpPr>
-          <p:cNvPr id="8" name="TextBox 7"/>
+              <a:t>- 바로퀵·2시간 배송으로 낮 가동률 제고</a:t>
+            </a:r>
+          </a:p>
+        </p:txBody>
+      </p:sp>
+      <p:sp>
+        <p:nvSpPr>
+          <p:cNvPr id="7" name="TextBox 6"/>
           <p:cNvSpPr txBox="1"/>
           <p:nvPr/>
         </p:nvSpPr>
         <p:spPr>
           <a:xfrm>
-            <a:off x="406799" y="2167200"/>
-            <a:ext cx="9093600" cy="345600"/>
+            <a:off x="424800" y="2167200"/>
+            <a:ext cx="9057600" cy="345600"/>
           </a:xfrm>
           <a:prstGeom prst="rect">
             <a:avLst/>
@@ -7170,21 +7022,21 @@
                 <a:ea typeface="맑은 고딕"/>
                 <a:cs typeface="맑은 고딕"/>
               </a:rPr>
-              <a:t>• 정치권 규제 완화 논의 진행 중 → 개정 시 주간 운영 노하우의 새벽배송 확장 가능</a:t>
-            </a:r>
-          </a:p>
-        </p:txBody>
-      </p:sp>
-      <p:sp>
-        <p:nvSpPr>
-          <p:cNvPr id="9" name="TextBox 8"/>
+              <a:t>• 규제 완화 개정 시 새벽배송 확장 가능</a:t>
+            </a:r>
+          </a:p>
+        </p:txBody>
+      </p:sp>
+      <p:sp>
+        <p:nvSpPr>
+          <p:cNvPr id="8" name="TextBox 7"/>
           <p:cNvSpPr txBox="1"/>
           <p:nvPr/>
         </p:nvSpPr>
         <p:spPr>
           <a:xfrm>
-            <a:off x="406799" y="2512800"/>
-            <a:ext cx="9093600" cy="345600"/>
+            <a:off x="424800" y="2512800"/>
+            <a:ext cx="9057600" cy="345600"/>
           </a:xfrm>
           <a:prstGeom prst="rect">
             <a:avLst/>
@@ -7207,22 +7059,22 @@
                 <a:ea typeface="맑은 고딕"/>
                 <a:cs typeface="맑은 고딕"/>
               </a:rPr>
-              <a:t>• 이커머스 3위 SSG닷컴의 배송 전략 기반 반등 여부 주목</a:t>
+              <a:t>• 이커머스 3위 SSG닷컴 반등 계기 주목</a:t>
             </a:r>
           </a:p>
         </p:txBody>
       </p:sp>
       <p:graphicFrame>
         <p:nvGraphicFramePr>
-          <p:cNvPr id="10" name="Table 9"/>
+          <p:cNvPr id="9" name="Table 8"/>
           <p:cNvGraphicFramePr>
             <a:graphicFrameLocks noGrp="1"/>
           </p:cNvGraphicFramePr>
           <p:nvPr/>
         </p:nvGraphicFramePr>
         <p:xfrm>
-          <a:off x="406799" y="3038400"/>
-          <a:ext cx="9093600" cy="1512000"/>
+          <a:off x="424800" y="3038400"/>
+          <a:ext cx="9057600" cy="1512000"/>
         </p:xfrm>
         <a:graphic>
           <a:graphicData uri="http://schemas.openxmlformats.org/drawingml/2006/table">
@@ -7232,7 +7084,7 @@
               </a:tblPr>
               <a:tblGrid>
                 <a:gridCol w="1800000"/>
-                <a:gridCol w="7293600"/>
+                <a:gridCol w="7257600"/>
               </a:tblGrid>
               <a:tr h="302400">
                 <a:tc>
@@ -7387,7 +7239,7 @@
                           <a:ea typeface="맑은 고딕"/>
                           <a:cs typeface="맑은 고딕"/>
                         </a:rPr>
-                        <a:t>이마트 양재점 · 하남점 시범 운영 개시 (7. 9.)</a:t>
+                        <a:t>양재·하남점 시범 운영</a:t>
                       </a:r>
                     </a:p>
                   </a:txBody>
@@ -7571,7 +7423,7 @@
                           <a:ea typeface="맑은 고딕"/>
                           <a:cs typeface="맑은 고딕"/>
                         </a:rPr>
-                        <a:t>전국 서비스 확대</a:t>
+                        <a:t>전국 확대</a:t>
                       </a:r>
                     </a:p>
                   </a:txBody>
@@ -7663,7 +7515,7 @@
                           <a:ea typeface="맑은 고딕"/>
                           <a:cs typeface="맑은 고딕"/>
                         </a:rPr>
-                        <a:t>50여 개 점포 운영 목표</a:t>
+                        <a:t>50여 개 점포 운영</a:t>
                       </a:r>
                     </a:p>
                   </a:txBody>

--- a/reports/ssg-delivery-report.pptx
+++ b/reports/ssg-delivery-report.pptx
@@ -3807,7 +3807,7 @@
                       <a:r>
                         <a:rPr sz="1000" b="1">
                           <a:solidFill>
-                            <a:srgbClr val="000066"/>
+                            <a:srgbClr val="000000"/>
                           </a:solidFill>
                           <a:latin typeface="맑은 고딕"/>
                           <a:ea typeface="맑은 고딕"/>
@@ -3852,7 +3852,7 @@
                       <a:r>
                         <a:rPr sz="1000" b="1">
                           <a:solidFill>
-                            <a:srgbClr val="000066"/>
+                            <a:srgbClr val="000000"/>
                           </a:solidFill>
                           <a:latin typeface="맑은 고딕"/>
                           <a:ea typeface="맑은 고딕"/>
@@ -4436,7 +4436,7 @@
                       <a:r>
                         <a:rPr sz="1000" b="1">
                           <a:solidFill>
-                            <a:srgbClr val="000066"/>
+                            <a:srgbClr val="000000"/>
                           </a:solidFill>
                           <a:latin typeface="맑은 고딕"/>
                           <a:ea typeface="맑은 고딕"/>
@@ -4481,7 +4481,7 @@
                       <a:r>
                         <a:rPr sz="1000" b="1">
                           <a:solidFill>
-                            <a:srgbClr val="000066"/>
+                            <a:srgbClr val="000000"/>
                           </a:solidFill>
                           <a:latin typeface="맑은 고딕"/>
                           <a:ea typeface="맑은 고딕"/>
@@ -4526,7 +4526,7 @@
                       <a:r>
                         <a:rPr sz="1000" b="1">
                           <a:solidFill>
-                            <a:srgbClr val="000066"/>
+                            <a:srgbClr val="000000"/>
                           </a:solidFill>
                           <a:latin typeface="맑은 고딕"/>
                           <a:ea typeface="맑은 고딕"/>
@@ -4571,7 +4571,7 @@
                       <a:r>
                         <a:rPr sz="1000" b="1">
                           <a:solidFill>
-                            <a:srgbClr val="000066"/>
+                            <a:srgbClr val="000000"/>
                           </a:solidFill>
                           <a:latin typeface="맑은 고딕"/>
                           <a:ea typeface="맑은 고딕"/>
@@ -4616,7 +4616,7 @@
                       <a:r>
                         <a:rPr sz="1000" b="1">
                           <a:solidFill>
-                            <a:srgbClr val="000066"/>
+                            <a:srgbClr val="000000"/>
                           </a:solidFill>
                           <a:latin typeface="맑은 고딕"/>
                           <a:ea typeface="맑은 고딕"/>
@@ -6234,7 +6234,7 @@
                       <a:r>
                         <a:rPr sz="1000" b="1">
                           <a:solidFill>
-                            <a:srgbClr val="000066"/>
+                            <a:srgbClr val="000000"/>
                           </a:solidFill>
                           <a:latin typeface="맑은 고딕"/>
                           <a:ea typeface="맑은 고딕"/>
@@ -6279,7 +6279,7 @@
                       <a:r>
                         <a:rPr sz="1000" b="1">
                           <a:solidFill>
-                            <a:srgbClr val="000066"/>
+                            <a:srgbClr val="000000"/>
                           </a:solidFill>
                           <a:latin typeface="맑은 고딕"/>
                           <a:ea typeface="맑은 고딕"/>
@@ -6324,7 +6324,7 @@
                       <a:r>
                         <a:rPr sz="1000" b="1">
                           <a:solidFill>
-                            <a:srgbClr val="000066"/>
+                            <a:srgbClr val="000000"/>
                           </a:solidFill>
                           <a:latin typeface="맑은 고딕"/>
                           <a:ea typeface="맑은 고딕"/>
@@ -7096,7 +7096,7 @@
                       <a:r>
                         <a:rPr sz="1000" b="1">
                           <a:solidFill>
-                            <a:srgbClr val="000066"/>
+                            <a:srgbClr val="000000"/>
                           </a:solidFill>
                           <a:latin typeface="맑은 고딕"/>
                           <a:ea typeface="맑은 고딕"/>
@@ -7141,7 +7141,7 @@
                       <a:r>
                         <a:rPr sz="1000" b="1">
                           <a:solidFill>
-                            <a:srgbClr val="000066"/>
+                            <a:srgbClr val="000000"/>
                           </a:solidFill>
                           <a:latin typeface="맑은 고딕"/>
                           <a:ea typeface="맑은 고딕"/>

--- a/reports/ssg-delivery-report.pptx
+++ b/reports/ssg-delivery-report.pptx
@@ -4487,7 +4487,7 @@
                           <a:ea typeface="맑은 고딕"/>
                           <a:cs typeface="맑은 고딕"/>
                         </a:rPr>
-                        <a:t>배송 속도</a:t>
+                        <a:t>배송 형태</a:t>
                       </a:r>
                     </a:p>
                   </a:txBody>

--- a/reports/ssg-delivery-report.pptx
+++ b/reports/ssg-delivery-report.pptx
@@ -3696,7 +3696,7 @@
                 <a:ea typeface="맑은 고딕"/>
                 <a:cs typeface="맑은 고딕"/>
               </a:rPr>
-              <a:t>- 20시 주문 마감 → 결제 후 2시간 내 배송, 예약배송 병행</a:t>
+              <a:t>- 20시까지 주문 접수 → 결제 후 2시간 내 배송 완료, 예약배송 병행</a:t>
             </a:r>
           </a:p>
         </p:txBody>
@@ -3997,7 +3997,7 @@
                           <a:ea typeface="맑은 고딕"/>
                           <a:cs typeface="맑은 고딕"/>
                         </a:rPr>
-                        <a:t>주문 마감</a:t>
+                        <a:t>주문 접수</a:t>
                       </a:r>
                     </a:p>
                   </a:txBody>
@@ -4042,7 +4042,7 @@
                           <a:ea typeface="맑은 고딕"/>
                           <a:cs typeface="맑은 고딕"/>
                         </a:rPr>
-                        <a:t>오후 8시</a:t>
+                        <a:t>20시까지 (이후 주문 불가)</a:t>
                       </a:r>
                     </a:p>
                   </a:txBody>
@@ -4134,7 +4134,7 @@
                           <a:ea typeface="맑은 고딕"/>
                           <a:cs typeface="맑은 고딕"/>
                         </a:rPr>
-                        <a:t>결제 후 2시간 이내</a:t>
+                        <a:t>결제 시점 기준 2시간 이내</a:t>
                       </a:r>
                     </a:p>
                   </a:txBody>

--- a/reports/ssg-delivery-report.pptx
+++ b/reports/ssg-delivery-report.pptx
@@ -3622,7 +3622,18 @@
                 <a:ea typeface="맑은 고딕"/>
                 <a:cs typeface="맑은 고딕"/>
               </a:rPr>
-              <a:t>※ 출처 : 비즈워치 「SSG닷컴, '2시간 실험'에 나선 진짜 이유는」('26. 7. 10.)</a:t>
+              <a:t>※ 출처 : 비즈워치 「SSG닷컴, '2시간 실험'에 나선 진짜 이유는」 </a:t>
+            </a:r>
+            <a:r>
+              <a:rPr sz="800" b="0">
+                <a:solidFill>
+                  <a:srgbClr val="000000"/>
+                </a:solidFill>
+                <a:latin typeface="맑은 고딕"/>
+                <a:ea typeface="맑은 고딕"/>
+                <a:cs typeface="맑은 고딕"/>
+              </a:rPr>
+              <a:t>('26. 7. 10.)</a:t>
             </a:r>
           </a:p>
         </p:txBody>
@@ -4042,7 +4053,18 @@
                           <a:ea typeface="맑은 고딕"/>
                           <a:cs typeface="맑은 고딕"/>
                         </a:rPr>
-                        <a:t>20시까지 (이후 주문 불가)</a:t>
+                        <a:t>20시까지 </a:t>
+                      </a:r>
+                      <a:r>
+                        <a:rPr sz="900" b="0">
+                          <a:solidFill>
+                            <a:srgbClr val="000000"/>
+                          </a:solidFill>
+                          <a:latin typeface="맑은 고딕"/>
+                          <a:ea typeface="맑은 고딕"/>
+                          <a:cs typeface="맑은 고딕"/>
+                        </a:rPr>
+                        <a:t>(이후 주문 불가)</a:t>
                       </a:r>
                     </a:p>
                   </a:txBody>
@@ -4720,7 +4742,7 @@
                     <a:p>
                       <a:pPr algn="ctr"/>
                       <a:r>
-                        <a:rPr sz="1000" b="0">
+                        <a:rPr sz="900" b="0">
                           <a:solidFill>
                             <a:srgbClr val="000000"/>
                           </a:solidFill>
@@ -5096,7 +5118,7 @@
                     <a:p>
                       <a:pPr algn="ctr"/>
                       <a:r>
-                        <a:rPr sz="1000" b="0">
+                        <a:rPr sz="900" b="0">
                           <a:solidFill>
                             <a:srgbClr val="000000"/>
                           </a:solidFill>
@@ -5429,7 +5451,7 @@
                     <a:p>
                       <a:pPr algn="ctr"/>
                       <a:r>
-                        <a:rPr sz="1000" b="0">
+                        <a:rPr sz="900" b="0">
                           <a:solidFill>
                             <a:srgbClr val="000000"/>
                           </a:solidFill>
@@ -5586,7 +5608,18 @@
                           <a:ea typeface="맑은 고딕"/>
                           <a:cs typeface="맑은 고딕"/>
                         </a:rPr>
-                        <a:t>매출 197%↑(6월, 1월比)</a:t>
+                        <a:t>매출 197%↑ </a:t>
+                      </a:r>
+                      <a:r>
+                        <a:rPr sz="900" b="0">
+                          <a:solidFill>
+                            <a:srgbClr val="000000"/>
+                          </a:solidFill>
+                          <a:latin typeface="맑은 고딕"/>
+                          <a:ea typeface="맑은 고딕"/>
+                          <a:cs typeface="맑은 고딕"/>
+                        </a:rPr>
+                        <a:t>(6월, 1월比)</a:t>
                       </a:r>
                     </a:p>
                   </a:txBody>
@@ -5633,7 +5666,18 @@
                           <a:ea typeface="맑은 고딕"/>
                           <a:cs typeface="맑은 고딕"/>
                         </a:rPr>
-                        <a:t>2시간 배송 (신규)</a:t>
+                        <a:t>2시간 배송 </a:t>
+                      </a:r>
+                      <a:r>
+                        <a:rPr sz="900" b="1">
+                          <a:solidFill>
+                            <a:srgbClr val="000000"/>
+                          </a:solidFill>
+                          <a:latin typeface="맑은 고딕"/>
+                          <a:ea typeface="맑은 고딕"/>
+                          <a:cs typeface="맑은 고딕"/>
+                        </a:rPr>
+                        <a:t>(신규)</a:t>
                       </a:r>
                     </a:p>
                   </a:txBody>
@@ -5684,7 +5728,7 @@
                     <a:p>
                       <a:pPr algn="ctr"/>
                       <a:r>
-                        <a:rPr sz="1000" b="0">
+                        <a:rPr sz="900" b="0">
                           <a:solidFill>
                             <a:srgbClr val="000000"/>
                           </a:solidFill>
@@ -6003,7 +6047,7 @@
           <a:p>
             <a:pPr algn="r"/>
             <a:r>
-              <a:rPr sz="1000" b="1">
+              <a:rPr sz="900" b="1">
                 <a:solidFill>
                   <a:srgbClr val="000000"/>
                 </a:solidFill>
@@ -6048,7 +6092,18 @@
                 <a:ea typeface="맑은 고딕"/>
                 <a:cs typeface="맑은 고딕"/>
               </a:rPr>
-              <a:t>※ 출처 : 비즈워치 「SSG닷컴, '2시간 실험'에 나선 진짜 이유는」('26. 7. 10.)</a:t>
+              <a:t>※ 출처 : 비즈워치 「SSG닷컴, '2시간 실험'에 나선 진짜 이유는」 </a:t>
+            </a:r>
+            <a:r>
+              <a:rPr sz="800" b="0">
+                <a:solidFill>
+                  <a:srgbClr val="000000"/>
+                </a:solidFill>
+                <a:latin typeface="맑은 고딕"/>
+                <a:ea typeface="맑은 고딕"/>
+                <a:cs typeface="맑은 고딕"/>
+              </a:rPr>
+              <a:t>('26. 7. 10.)</a:t>
             </a:r>
           </a:p>
         </p:txBody>
@@ -6122,7 +6177,29 @@
                 <a:ea typeface="맑은 고딕"/>
                 <a:cs typeface="맑은 고딕"/>
               </a:rPr>
-              <a:t>• 바로퀵 매출 197%↑(6월, 1월比) → 수요 실증</a:t>
+              <a:t>• 바로퀵 매출 197%↑ </a:t>
+            </a:r>
+            <a:r>
+              <a:rPr sz="1100" b="1">
+                <a:solidFill>
+                  <a:srgbClr val="000000"/>
+                </a:solidFill>
+                <a:latin typeface="맑은 고딕"/>
+                <a:ea typeface="맑은 고딕"/>
+                <a:cs typeface="맑은 고딕"/>
+              </a:rPr>
+              <a:t>(6월, 1월比)</a:t>
+            </a:r>
+            <a:r>
+              <a:rPr sz="1200" b="1">
+                <a:solidFill>
+                  <a:srgbClr val="000000"/>
+                </a:solidFill>
+                <a:latin typeface="맑은 고딕"/>
+                <a:ea typeface="맑은 고딕"/>
+                <a:cs typeface="맑은 고딕"/>
+              </a:rPr>
+              <a:t> → 수요 실증</a:t>
             </a:r>
           </a:p>
         </p:txBody>
@@ -6159,7 +6236,51 @@
                 <a:ea typeface="맑은 고딕"/>
                 <a:cs typeface="맑은 고딕"/>
               </a:rPr>
-              <a:t>• 1시간(소량·이륜차) / 2시간(대용량·사륜차) 이원화</a:t>
+              <a:t>• 1시간 </a:t>
+            </a:r>
+            <a:r>
+              <a:rPr sz="1100" b="1">
+                <a:solidFill>
+                  <a:srgbClr val="000000"/>
+                </a:solidFill>
+                <a:latin typeface="맑은 고딕"/>
+                <a:ea typeface="맑은 고딕"/>
+                <a:cs typeface="맑은 고딕"/>
+              </a:rPr>
+              <a:t>(소량·이륜차)</a:t>
+            </a:r>
+            <a:r>
+              <a:rPr sz="1200" b="1">
+                <a:solidFill>
+                  <a:srgbClr val="000000"/>
+                </a:solidFill>
+                <a:latin typeface="맑은 고딕"/>
+                <a:ea typeface="맑은 고딕"/>
+                <a:cs typeface="맑은 고딕"/>
+              </a:rPr>
+              <a:t> / 2시간 </a:t>
+            </a:r>
+            <a:r>
+              <a:rPr sz="1100" b="1">
+                <a:solidFill>
+                  <a:srgbClr val="000000"/>
+                </a:solidFill>
+                <a:latin typeface="맑은 고딕"/>
+                <a:ea typeface="맑은 고딕"/>
+                <a:cs typeface="맑은 고딕"/>
+              </a:rPr>
+              <a:t>(대용량·사륜차)</a:t>
+            </a:r>
+            <a:r>
+              <a:rPr sz="1200" b="1">
+                <a:solidFill>
+                  <a:srgbClr val="000000"/>
+                </a:solidFill>
+                <a:latin typeface="맑은 고딕"/>
+                <a:ea typeface="맑은 고딕"/>
+                <a:cs typeface="맑은 고딕"/>
+              </a:rPr>
+              <a:t> 이원화</a:t>
             </a:r>
           </a:p>
         </p:txBody>
@@ -6911,7 +7032,29 @@
                 <a:ea typeface="맑은 고딕"/>
                 <a:cs typeface="맑은 고딕"/>
               </a:rPr>
-              <a:t>※ 유통산업발전법('12년) : 대형마트 영업 0~10시 제한 · 월 2회 의무휴업</a:t>
+              <a:t>※ 유통산업발전법 </a:t>
+            </a:r>
+            <a:r>
+              <a:rPr sz="800" b="0">
+                <a:solidFill>
+                  <a:srgbClr val="000000"/>
+                </a:solidFill>
+                <a:latin typeface="맑은 고딕"/>
+                <a:ea typeface="맑은 고딕"/>
+                <a:cs typeface="맑은 고딕"/>
+              </a:rPr>
+              <a:t>('12년)</a:t>
+            </a:r>
+            <a:r>
+              <a:rPr sz="900" b="0">
+                <a:solidFill>
+                  <a:srgbClr val="000000"/>
+                </a:solidFill>
+                <a:latin typeface="맑은 고딕"/>
+                <a:ea typeface="맑은 고딕"/>
+                <a:cs typeface="맑은 고딕"/>
+              </a:rPr>
+              <a:t> : 대형마트 영업 0~10시 제한 · 월 2회 의무휴업</a:t>
             </a:r>
           </a:p>
         </p:txBody>

--- a/reports/ssg-delivery-report.pptx
+++ b/reports/ssg-delivery-report.pptx
@@ -5619,7 +5619,7 @@
                           <a:ea typeface="맑은 고딕"/>
                           <a:cs typeface="맑은 고딕"/>
                         </a:rPr>
-                        <a:t>(6월, 1월比)</a:t>
+                        <a:t>(6월, 1월 대비)</a:t>
                       </a:r>
                     </a:p>
                   </a:txBody>
@@ -6188,7 +6188,7 @@
                 <a:ea typeface="맑은 고딕"/>
                 <a:cs typeface="맑은 고딕"/>
               </a:rPr>
-              <a:t>(6월, 1월比)</a:t>
+              <a:t>(6월, 1월 대비)</a:t>
             </a:r>
             <a:r>
               <a:rPr sz="1200" b="1">
